--- a/fixtures/real-world/rsm-technology-strategy-fr.pptx
+++ b/fixtures/real-world/rsm-technology-strategy-fr.pptx
@@ -1715,7 +1715,7 @@
         <a:p>
           <a:r>
             <a:rPr lang="en-GB" sz="1100" b="1" dirty="0" smtClean="0"/>
-            <a:t>RSM Technology Consulting</a:t>
+            <a:t>FR: RSM Technology Consulting</a:t>
           </a:r>
           <a:endParaRPr lang="en-GB" sz="1100" b="1" dirty="0"/>
         </a:p>
@@ -1752,7 +1752,7 @@
         <a:p>
           <a:r>
             <a:rPr lang="en-GB" sz="1100" b="1" dirty="0" smtClean="0"/>
-            <a:t>Digital &amp; IT strategy</a:t>
+            <a:t>FR: Digital  IT strategy</a:t>
           </a:r>
           <a:endParaRPr lang="en-GB" sz="1100" b="1" dirty="0"/>
         </a:p>
@@ -1789,7 +1789,7 @@
         <a:p>
           <a:r>
             <a:rPr lang="en-GB" sz="1100" b="1" dirty="0" smtClean="0"/>
-            <a:t>ERP &amp; accounting systems</a:t>
+            <a:t>FR: ERP  accounting systems</a:t>
           </a:r>
           <a:endParaRPr lang="en-GB" sz="1100" b="1" dirty="0"/>
         </a:p>
@@ -1830,7 +1830,7 @@
               <a:ea typeface="+mn-ea"/>
               <a:cs typeface="+mn-cs"/>
             </a:rPr>
-            <a:t>IT risk</a:t>
+            <a:t>FR: IT risk</a:t>
           </a:r>
           <a:br>
             <a:rPr lang="en-GB" sz="1100" b="1" smtClean="0">
@@ -1845,7 +1845,7 @@
               <a:ea typeface="+mn-ea"/>
               <a:cs typeface="+mn-cs"/>
             </a:rPr>
-            <a:t>and</a:t>
+            <a:t>FR: and</a:t>
           </a:r>
           <a:br>
             <a:rPr lang="en-GB" sz="1100" b="1" smtClean="0">
@@ -1860,7 +1860,7 @@
               <a:ea typeface="+mn-ea"/>
               <a:cs typeface="+mn-cs"/>
             </a:rPr>
-            <a:t>security</a:t>
+            <a:t>FR: security</a:t>
           </a:r>
           <a:endParaRPr lang="en-GB" sz="1100" b="1" dirty="0"/>
         </a:p>
@@ -1897,7 +1897,7 @@
         <a:p>
           <a:r>
             <a:rPr lang="en-GB" sz="1100" b="1" dirty="0" smtClean="0"/>
-            <a:t>IT resilience</a:t>
+            <a:t>FR: IT resilience</a:t>
           </a:r>
           <a:endParaRPr lang="en-GB" sz="1100" b="1" dirty="0"/>
         </a:p>
@@ -1934,7 +1934,7 @@
         <a:p>
           <a:r>
             <a:rPr lang="en-GB" sz="1100" b="1" dirty="0" smtClean="0"/>
-            <a:t>System selection</a:t>
+            <a:t>FR: System selection</a:t>
           </a:r>
           <a:endParaRPr lang="en-GB" sz="1100" b="1" dirty="0"/>
         </a:p>
@@ -1971,7 +1971,7 @@
         <a:p>
           <a:r>
             <a:rPr lang="en-GB" sz="1100" b="1" dirty="0" smtClean="0"/>
-            <a:t>IT project delivery</a:t>
+            <a:t>FR: IT project delivery</a:t>
           </a:r>
           <a:endParaRPr lang="en-GB" sz="1100" b="1" dirty="0"/>
         </a:p>
@@ -2351,7 +2351,7 @@
         <a:p>
           <a:r>
             <a:rPr lang="en-GB" dirty="0" smtClean="0"/>
-            <a:t>Create a Digital Vision</a:t>
+            <a:t>FR: Create a Digital Vision</a:t>
           </a:r>
           <a:endParaRPr lang="en-GB" dirty="0"/>
         </a:p>
@@ -2388,7 +2388,7 @@
         <a:p>
           <a:r>
             <a:rPr lang="en-GB" dirty="0" smtClean="0"/>
-            <a:t>Establish clear leadership</a:t>
+            <a:t>FR: Establish clear leadership</a:t>
           </a:r>
           <a:endParaRPr lang="en-GB" dirty="0"/>
         </a:p>
@@ -2425,7 +2425,7 @@
         <a:p>
           <a:r>
             <a:rPr lang="en-GB" dirty="0" smtClean="0"/>
-            <a:t>Adopt a Continuous Improvement culture</a:t>
+            <a:t>FR: Adopt a Continuous Improvement culture</a:t>
           </a:r>
           <a:endParaRPr lang="en-GB" dirty="0"/>
         </a:p>
@@ -2462,7 +2462,7 @@
         <a:p>
           <a:r>
             <a:rPr lang="en-GB" sz="1000" dirty="0" smtClean="0"/>
-            <a:t>Feedback and learning is key in digital transformation. As the organisation transforms, new opportunities will present themselves and an appropriate culture of continuous improvement is required, with staff acquiring new skills.</a:t>
+            <a:t>FR: Feedback and learning is key in digital transformation. As the organisation transforms, new opportunities will present themselves and an appropriate culture of continuous improvement is required, with staff acquiring new skills.</a:t>
           </a:r>
           <a:endParaRPr lang="en-GB" sz="1000" dirty="0"/>
         </a:p>
@@ -2499,7 +2499,7 @@
         <a:p>
           <a:r>
             <a:rPr lang="en-GB" dirty="0" smtClean="0"/>
-            <a:t>Select appropriate digital technologies</a:t>
+            <a:t>FR: Select appropriate digital technologies</a:t>
           </a:r>
           <a:endParaRPr lang="en-GB" dirty="0"/>
         </a:p>
@@ -2536,7 +2536,7 @@
         <a:p>
           <a:r>
             <a:rPr lang="en-GB" sz="1000" dirty="0" smtClean="0"/>
-            <a:t> Create a clear vision for how digital technology can support and drive the organisation’s corporate strategy.  This requires an understanding of the potential of new technology combined with a clearly defined commercial strategy</a:t>
+            <a:t>FR:  Create a clear vision for how digital technology can support and drive the organisation’s corporate strategy.  This requires an understanding of the potential of new technology combined with a clearly defined commercial strategy</a:t>
           </a:r>
           <a:endParaRPr lang="en-GB" sz="1000" dirty="0"/>
         </a:p>
@@ -2573,7 +2573,7 @@
         <a:p>
           <a:r>
             <a:rPr lang="en-GB" sz="1000" dirty="0" smtClean="0"/>
-            <a:t>For digital transformation to succeed it requires full commitment from senior management across all functions.  Therefore there has to be a clear and agreed vision that transcends departmental boundaries, with a clear sponsorship structure for digital initiatives</a:t>
+            <a:t>FR: For digital transformation to succeed it requires full commitment from senior management across all functions.  Therefore there has to be a clear and agreed vision that transcends departmental boundaries, with a clear sponsorship structure for digital initiatives</a:t>
           </a:r>
           <a:endParaRPr lang="en-GB" sz="1000" dirty="0"/>
         </a:p>
@@ -2610,7 +2610,7 @@
         <a:p>
           <a:r>
             <a:rPr lang="en-GB" sz="1000" dirty="0" smtClean="0"/>
-            <a:t>Our experience tells us that the best approach to digital change is to avoid dismissing early ideas in order to generate a long-list of digital initiatives, which can then be evaluated against the Digital Vision</a:t>
+            <a:t>FR: Our experience tells us that the best approach to digital change is to avoid dismissing early ideas in order to generate a long-list of digital initiatives, which can then be evaluated against the Digital Vision</a:t>
           </a:r>
           <a:endParaRPr lang="en-GB" sz="1000" dirty="0"/>
         </a:p>
@@ -2647,7 +2647,7 @@
         <a:p>
           <a:r>
             <a:rPr lang="en-GB" dirty="0" smtClean="0"/>
-            <a:t>Build momentum</a:t>
+            <a:t>FR: Build momentum</a:t>
           </a:r>
           <a:endParaRPr lang="en-GB" dirty="0"/>
         </a:p>
@@ -2684,7 +2684,7 @@
         <a:p>
           <a:r>
             <a:rPr lang="en-GB" sz="1000" dirty="0" smtClean="0"/>
-            <a:t>No organisation can do everything at once.  It is vital to be realistic with digital transformation, starting with quick wins and building momentum to drive the transformation forward. </a:t>
+            <a:t>FR: No organisation can do everything at once.  It is vital to be realistic with digital transformation, starting with quick wins and building momentum to drive the transformation forward. </a:t>
           </a:r>
           <a:endParaRPr lang="en-GB" sz="1000" dirty="0"/>
         </a:p>

--- a/fixtures/real-world/rsm-technology-strategy-fr.pptx
+++ b/fixtures/real-world/rsm-technology-strategy-fr.pptx
@@ -1715,7 +1715,7 @@
         <a:p>
           <a:r>
             <a:rPr lang="en-GB" sz="1100" b="1" dirty="0" smtClean="0"/>
-            <a:t>FR: RSM Technology Consulting</a:t>
+            <a:t>RSM Technology Consulting</a:t>
           </a:r>
           <a:endParaRPr lang="en-GB" sz="1100" b="1" dirty="0"/>
         </a:p>
@@ -1752,7 +1752,7 @@
         <a:p>
           <a:r>
             <a:rPr lang="en-GB" sz="1100" b="1" dirty="0" smtClean="0"/>
-            <a:t>FR: Digital  IT strategy</a:t>
+            <a:t>Stratégie numérique et informatique</a:t>
           </a:r>
           <a:endParaRPr lang="en-GB" sz="1100" b="1" dirty="0"/>
         </a:p>
@@ -1789,7 +1789,7 @@
         <a:p>
           <a:r>
             <a:rPr lang="en-GB" sz="1100" b="1" dirty="0" smtClean="0"/>
-            <a:t>FR: ERP  accounting systems</a:t>
+            <a:t>ERP et systèmes comptables</a:t>
           </a:r>
           <a:endParaRPr lang="en-GB" sz="1100" b="1" dirty="0"/>
         </a:p>
@@ -1830,7 +1830,7 @@
               <a:ea typeface="+mn-ea"/>
               <a:cs typeface="+mn-cs"/>
             </a:rPr>
-            <a:t>FR: IT risk</a:t>
+            <a:t>Risque informatique</a:t>
           </a:r>
           <a:br>
             <a:rPr lang="en-GB" sz="1100" b="1" smtClean="0">
@@ -1845,7 +1845,7 @@
               <a:ea typeface="+mn-ea"/>
               <a:cs typeface="+mn-cs"/>
             </a:rPr>
-            <a:t>FR: and</a:t>
+            <a:t>et</a:t>
           </a:r>
           <a:br>
             <a:rPr lang="en-GB" sz="1100" b="1" smtClean="0">
@@ -1860,7 +1860,7 @@
               <a:ea typeface="+mn-ea"/>
               <a:cs typeface="+mn-cs"/>
             </a:rPr>
-            <a:t>FR: security</a:t>
+            <a:t>sécurité</a:t>
           </a:r>
           <a:endParaRPr lang="en-GB" sz="1100" b="1" dirty="0"/>
         </a:p>
@@ -1897,7 +1897,7 @@
         <a:p>
           <a:r>
             <a:rPr lang="en-GB" sz="1100" b="1" dirty="0" smtClean="0"/>
-            <a:t>FR: IT resilience</a:t>
+            <a:t>Résilience informatique</a:t>
           </a:r>
           <a:endParaRPr lang="en-GB" sz="1100" b="1" dirty="0"/>
         </a:p>
@@ -1934,7 +1934,7 @@
         <a:p>
           <a:r>
             <a:rPr lang="en-GB" sz="1100" b="1" dirty="0" smtClean="0"/>
-            <a:t>FR: System selection</a:t>
+            <a:t>Sélection de systèmes</a:t>
           </a:r>
           <a:endParaRPr lang="en-GB" sz="1100" b="1" dirty="0"/>
         </a:p>
@@ -1971,7 +1971,7 @@
         <a:p>
           <a:r>
             <a:rPr lang="en-GB" sz="1100" b="1" dirty="0" smtClean="0"/>
-            <a:t>FR: IT project delivery</a:t>
+            <a:t>Conduite de projets informatiques</a:t>
           </a:r>
           <a:endParaRPr lang="en-GB" sz="1100" b="1" dirty="0"/>
         </a:p>
@@ -2351,7 +2351,7 @@
         <a:p>
           <a:r>
             <a:rPr lang="en-GB" dirty="0" smtClean="0"/>
-            <a:t>FR: Create a Digital Vision</a:t>
+            <a:t>Créer une vision numérique</a:t>
           </a:r>
           <a:endParaRPr lang="en-GB" dirty="0"/>
         </a:p>
@@ -2388,7 +2388,7 @@
         <a:p>
           <a:r>
             <a:rPr lang="en-GB" dirty="0" smtClean="0"/>
-            <a:t>FR: Establish clear leadership</a:t>
+            <a:t>Établir un leadership clair</a:t>
           </a:r>
           <a:endParaRPr lang="en-GB" dirty="0"/>
         </a:p>
@@ -2425,7 +2425,7 @@
         <a:p>
           <a:r>
             <a:rPr lang="en-GB" dirty="0" smtClean="0"/>
-            <a:t>FR: Adopt a Continuous Improvement culture</a:t>
+            <a:t>Adopter une culture d'amélioration continue</a:t>
           </a:r>
           <a:endParaRPr lang="en-GB" dirty="0"/>
         </a:p>
@@ -2462,7 +2462,7 @@
         <a:p>
           <a:r>
             <a:rPr lang="en-GB" sz="1000" dirty="0" smtClean="0"/>
-            <a:t>FR: Feedback and learning is key in digital transformation. As the organisation transforms, new opportunities will present themselves and an appropriate culture of continuous improvement is required, with staff acquiring new skills.</a:t>
+            <a:t>Le retour d'expérience et l'apprentissage sont essentiels dans la transformation numérique. À mesure que l'organisation se transforme, de nouvelles opportunités se présentent et une culture appropriée d'amélioration continue est nécessaire, le personnel acquérant de nouvelles compétences.</a:t>
           </a:r>
           <a:endParaRPr lang="en-GB" sz="1000" dirty="0"/>
         </a:p>
@@ -2499,7 +2499,7 @@
         <a:p>
           <a:r>
             <a:rPr lang="en-GB" dirty="0" smtClean="0"/>
-            <a:t>FR: Select appropriate digital technologies</a:t>
+            <a:t>Sélectionner les technologies numériques appropriées</a:t>
           </a:r>
           <a:endParaRPr lang="en-GB" dirty="0"/>
         </a:p>
@@ -2536,7 +2536,7 @@
         <a:p>
           <a:r>
             <a:rPr lang="en-GB" sz="1000" dirty="0" smtClean="0"/>
-            <a:t>FR:  Create a clear vision for how digital technology can support and drive the organisation’s corporate strategy.  This requires an understanding of the potential of new technology combined with a clearly defined commercial strategy</a:t>
+            <a:t>Créer une vision claire de la manière dont la technologie numérique peut soutenir et porter la stratégie d'entreprise de l'organisation. Cela requiert une compréhension du potentiel des nouvelles technologies, associée à une stratégie commerciale clairement définie.</a:t>
           </a:r>
           <a:endParaRPr lang="en-GB" sz="1000" dirty="0"/>
         </a:p>
@@ -2573,7 +2573,7 @@
         <a:p>
           <a:r>
             <a:rPr lang="en-GB" sz="1000" dirty="0" smtClean="0"/>
-            <a:t>FR: For digital transformation to succeed it requires full commitment from senior management across all functions.  Therefore there has to be a clear and agreed vision that transcends departmental boundaries, with a clear sponsorship structure for digital initiatives</a:t>
+            <a:t>Pour que la transformation numérique réussisse, elle exige un engagement total de la direction générale dans toutes les fonctions. Il doit donc exister une vision claire et partagée qui dépasse les frontières des départements, avec une structure de parrainage clairement établie pour les initiatives numériques.</a:t>
           </a:r>
           <a:endParaRPr lang="en-GB" sz="1000" dirty="0"/>
         </a:p>
@@ -2610,7 +2610,7 @@
         <a:p>
           <a:r>
             <a:rPr lang="en-GB" sz="1000" dirty="0" smtClean="0"/>
-            <a:t>FR: Our experience tells us that the best approach to digital change is to avoid dismissing early ideas in order to generate a long-list of digital initiatives, which can then be evaluated against the Digital Vision</a:t>
+            <a:t>Notre expérience nous enseigne que la meilleure approche du changement numérique consiste à éviter d'écarter les idées initiales afin de constituer une longue liste d'initiatives numériques, qui peuvent ensuite être évaluées au regard de la vision numérique.</a:t>
           </a:r>
           <a:endParaRPr lang="en-GB" sz="1000" dirty="0"/>
         </a:p>
@@ -2647,7 +2647,7 @@
         <a:p>
           <a:r>
             <a:rPr lang="en-GB" dirty="0" smtClean="0"/>
-            <a:t>FR: Build momentum</a:t>
+            <a:t>Créer une dynamique</a:t>
           </a:r>
           <a:endParaRPr lang="en-GB" dirty="0"/>
         </a:p>
@@ -2684,7 +2684,7 @@
         <a:p>
           <a:r>
             <a:rPr lang="en-GB" sz="1000" dirty="0" smtClean="0"/>
-            <a:t>FR: No organisation can do everything at once.  It is vital to be realistic with digital transformation, starting with quick wins and building momentum to drive the transformation forward. </a:t>
+            <a:t>Aucune organisation ne peut tout faire à la fois. Il est essentiel de rester réaliste dans la transformation numérique, en commençant par des succès rapides et en bâtissant une dynamique pour faire avancer la transformation.</a:t>
           </a:r>
           <a:endParaRPr lang="en-GB" sz="1000" dirty="0"/>
         </a:p>
@@ -3225,7 +3225,7 @@
           </a:pPr>
           <a:r>
             <a:rPr lang="en-GB" sz="1100" b="1" kern="1200" dirty="0" smtClean="0"/>
-            <a:t>Digital &amp; IT strategy</a:t>
+            <a:t>Stratégie numérique et informatique</a:t>
           </a:r>
           <a:endParaRPr lang="en-GB" sz="1100" b="1" kern="1200" dirty="0"/>
         </a:p>
@@ -3355,7 +3355,7 @@
           </a:pPr>
           <a:r>
             <a:rPr lang="en-GB" sz="1100" b="1" kern="1200" dirty="0" smtClean="0"/>
-            <a:t>System selection</a:t>
+            <a:t>ERP et systèmes comptables</a:t>
           </a:r>
           <a:endParaRPr lang="en-GB" sz="1100" b="1" kern="1200" dirty="0"/>
         </a:p>
@@ -3485,7 +3485,7 @@
           </a:pPr>
           <a:r>
             <a:rPr lang="en-GB" sz="1100" b="1" kern="1200" dirty="0" smtClean="0"/>
-            <a:t>ERP &amp; accounting systems</a:t>
+            <a:t>Risque informatique</a:t>
           </a:r>
           <a:endParaRPr lang="en-GB" sz="1100" b="1" kern="1200" dirty="0"/>
         </a:p>
@@ -3615,7 +3615,7 @@
           </a:pPr>
           <a:r>
             <a:rPr lang="en-GB" sz="1100" b="1" kern="1200" dirty="0" smtClean="0"/>
-            <a:t>IT project delivery</a:t>
+            <a:t>Résilience informatique</a:t>
           </a:r>
           <a:endParaRPr lang="en-GB" sz="1100" b="1" kern="1200" dirty="0"/>
         </a:p>
@@ -3752,7 +3752,7 @@
               <a:ea typeface="+mn-ea"/>
               <a:cs typeface="+mn-cs"/>
             </a:rPr>
-            <a:t>IT risk</a:t>
+            <a:t>Sélection de systèmes</a:t>
           </a:r>
           <a:br>
             <a:rPr lang="en-GB" sz="1100" b="1" kern="1200" smtClean="0">
@@ -3862,7 +3862,7 @@
           </a:pPr>
           <a:r>
             <a:rPr lang="en-GB" sz="1100" b="1" kern="1200" dirty="0" smtClean="0"/>
-            <a:t>IT resilience</a:t>
+            <a:t>Conduite de projets informatiques</a:t>
           </a:r>
           <a:endParaRPr lang="en-GB" sz="1100" b="1" kern="1200" dirty="0"/>
         </a:p>
@@ -3961,7 +3961,7 @@
           </a:pPr>
           <a:r>
             <a:rPr lang="en-GB" sz="1000" kern="1200" dirty="0" smtClean="0"/>
-            <a:t> Create a clear vision for how digital technology can support and drive the organisation’s corporate strategy.  This requires an understanding of the potential of new technology combined with a clearly defined commercial strategy</a:t>
+            <a:t>Créer une vision numérique</a:t>
           </a:r>
           <a:endParaRPr lang="en-GB" sz="1000" kern="1200" dirty="0"/>
         </a:p>
@@ -4038,7 +4038,7 @@
           </a:pPr>
           <a:r>
             <a:rPr lang="en-GB" sz="1100" kern="1200" dirty="0" smtClean="0"/>
-            <a:t>Create a Digital Vision</a:t>
+            <a:t>Établir un leadership clair</a:t>
           </a:r>
           <a:endParaRPr lang="en-GB" sz="1100" kern="1200" dirty="0"/>
         </a:p>
@@ -4125,7 +4125,7 @@
           </a:pPr>
           <a:r>
             <a:rPr lang="en-GB" sz="1000" kern="1200" dirty="0" smtClean="0"/>
-            <a:t>For digital transformation to succeed it requires full commitment from senior management across all functions.  Therefore there has to be a clear and agreed vision that transcends departmental boundaries, with a clear sponsorship structure for digital initiatives</a:t>
+            <a:t>Adopter une culture d'amélioration continue</a:t>
           </a:r>
           <a:endParaRPr lang="en-GB" sz="1000" kern="1200" dirty="0"/>
         </a:p>
@@ -4202,7 +4202,7 @@
           </a:pPr>
           <a:r>
             <a:rPr lang="en-GB" sz="1100" kern="1200" dirty="0" smtClean="0"/>
-            <a:t>Establish clear leadership</a:t>
+            <a:t>Le retour d'expérience et l'apprentissage sont essentiels dans la transformation numérique. À mesure que l'organisation se transforme, de nouvelles opportunités se présentent et une culture appropriée d'amélioration continue est nécessaire, le personnel acquérant de nouvelles compétences.</a:t>
           </a:r>
           <a:endParaRPr lang="en-GB" sz="1100" kern="1200" dirty="0"/>
         </a:p>
@@ -4289,7 +4289,7 @@
           </a:pPr>
           <a:r>
             <a:rPr lang="en-GB" sz="1000" kern="1200" dirty="0" smtClean="0"/>
-            <a:t>Our experience tells us that the best approach to digital change is to avoid dismissing early ideas in order to generate a long-list of digital initiatives, which can then be evaluated against the Digital Vision</a:t>
+            <a:t>Sélectionner les technologies numériques appropriées</a:t>
           </a:r>
           <a:endParaRPr lang="en-GB" sz="1000" kern="1200" dirty="0"/>
         </a:p>
@@ -4366,7 +4366,7 @@
           </a:pPr>
           <a:r>
             <a:rPr lang="en-GB" sz="1100" kern="1200" dirty="0" smtClean="0"/>
-            <a:t>Select appropriate digital technologies</a:t>
+            <a:t>Créer une vision claire de la manière dont la technologie numérique peut soutenir et porter la stratégie d'entreprise de l'organisation. Cela requiert une compréhension du potentiel des nouvelles technologies, associée à une stratégie commerciale clairement définie.</a:t>
           </a:r>
           <a:endParaRPr lang="en-GB" sz="1100" kern="1200" dirty="0"/>
         </a:p>
@@ -4453,7 +4453,7 @@
           </a:pPr>
           <a:r>
             <a:rPr lang="en-GB" sz="1000" kern="1200" dirty="0" smtClean="0"/>
-            <a:t>No organisation can do everything at once.  It is vital to be realistic with digital transformation, starting with quick wins and building momentum to drive the transformation forward. </a:t>
+            <a:t>Pour que la transformation numérique réussisse, elle exige un engagement total de la direction générale dans toutes les fonctions. Il doit donc exister une vision claire et partagée qui dépasse les frontières des départements, avec une structure de parrainage clairement établie pour les initiatives numériques.</a:t>
           </a:r>
           <a:endParaRPr lang="en-GB" sz="1000" kern="1200" dirty="0"/>
         </a:p>
@@ -4530,7 +4530,7 @@
           </a:pPr>
           <a:r>
             <a:rPr lang="en-GB" sz="1100" kern="1200" dirty="0" smtClean="0"/>
-            <a:t>Build momentum</a:t>
+            <a:t>Notre expérience nous enseigne que la meilleure approche du changement numérique consiste à éviter d'écarter les idées initiales afin de constituer une longue liste d'initiatives numériques, qui peuvent ensuite être évaluées au regard de la vision numérique.</a:t>
           </a:r>
           <a:endParaRPr lang="en-GB" sz="1100" kern="1200" dirty="0"/>
         </a:p>
@@ -4617,7 +4617,7 @@
           </a:pPr>
           <a:r>
             <a:rPr lang="en-GB" sz="1000" kern="1200" dirty="0" smtClean="0"/>
-            <a:t>Feedback and learning is key in digital transformation. As the organisation transforms, new opportunities will present themselves and an appropriate culture of continuous improvement is required, with staff acquiring new skills.</a:t>
+            <a:t>Créer une dynamique</a:t>
           </a:r>
           <a:endParaRPr lang="en-GB" sz="1000" kern="1200" dirty="0"/>
         </a:p>
@@ -4694,7 +4694,7 @@
           </a:pPr>
           <a:r>
             <a:rPr lang="en-GB" sz="1100" kern="1200" dirty="0" smtClean="0"/>
-            <a:t>Adopt a Continuous Improvement culture</a:t>
+            <a:t>Aucune organisation ne peut tout faire à la fois. Il est essentiel de rester réaliste dans la transformation numérique, en commençant par des succès rapides et en bâtissant une dynamique pour faire avancer la transformation.</a:t>
           </a:r>
           <a:endParaRPr lang="en-GB" sz="1100" kern="1200" dirty="0"/>
         </a:p>
@@ -17413,7 +17413,6 @@
               <a:rPr lang="en-GB" dirty="0" smtClean="0"/>
               <a:t>Comment aborder la transformation numérique</a:t>
             </a:r>
-            <a:endParaRPr lang="en-GB" dirty="0"/>
           </a:p>
         </p:txBody>
       </p:sp>
@@ -17439,18 +17438,9 @@
           </a:bodyPr>
           <a:lstStyle/>
           <a:p>
-            <a:pPr marL="0" indent="0">
-              <a:spcBef>
-                <a:spcPts val="600"/>
-              </a:spcBef>
-              <a:spcAft>
-                <a:spcPts val="600"/>
-              </a:spcAft>
-              <a:buNone/>
-            </a:pPr>
             <a:r>
               <a:rPr lang="en-US" sz="1200" b="1" dirty="0" smtClean="0"/>
-              <a:t>D’après notre expérience en matière de transformation numérique, les facteurs suivants sont essentiels à la réussite :</a:t>
+              <a:t>D'après notre expérience de la transformation numérique, les facteurs suivants sont déterminants pour la réussite :</a:t>
             </a:r>
           </a:p>
         </p:txBody>
@@ -17584,44 +17574,14 @@
           </a:bodyPr>
           <a:lstStyle/>
           <a:p>
-            <a:pPr algn="ctr"/>
             <a:r>
               <a:rPr lang="en-GB" sz="2400" baseline="30000" dirty="0">
                 <a:solidFill>
                   <a:schemeClr val="bg1"/>
                 </a:solidFill>
               </a:rPr>
-              <a:t>Collaboration. Compréhension. </a:t>
+              <a:t>Collaboration. Compréhension. Idées et perspectives.</a:t>
             </a:r>
-            <a:r>
-              <a:rPr lang="en-GB" sz="2400" baseline="30000" dirty="0" smtClean="0">
-                <a:solidFill>
-                  <a:schemeClr val="bg1"/>
-                </a:solidFill>
-              </a:rPr>
-              <a:t>Idées </a:t>
-            </a:r>
-            <a:r>
-              <a:rPr lang="en-GB" sz="2400" baseline="30000" dirty="0">
-                <a:solidFill>
-                  <a:schemeClr val="bg1"/>
-                </a:solidFill>
-              </a:rPr>
-              <a:t>et perspectives</a:t>
-            </a:r>
-            <a:r>
-              <a:rPr lang="en-GB" sz="2400" baseline="30000" dirty="0" smtClean="0">
-                <a:solidFill>
-                  <a:schemeClr val="bg1"/>
-                </a:solidFill>
-              </a:rPr>
-              <a:t>.</a:t>
-            </a:r>
-            <a:endParaRPr lang="en-GB" sz="2400" baseline="30000" dirty="0">
-              <a:solidFill>
-                <a:schemeClr val="bg1"/>
-              </a:solidFill>
-            </a:endParaRPr>
           </a:p>
         </p:txBody>
       </p:sp>
@@ -17729,177 +17689,87 @@
                   <a:srgbClr val="63666A"/>
                 </a:solidFill>
               </a:rPr>
-              <a:t>RSM</a:t>
+              <a:t>RSM 25 Farringdon Street Londres EC4A 4AB</a:t>
             </a:r>
-            <a:br>
-              <a:rPr lang="de-DE" sz="1100" dirty="0">
-                <a:solidFill>
-                  <a:srgbClr val="63666A"/>
-                </a:solidFill>
-              </a:rPr>
-            </a:br>
+          </a:p>
+          <a:p>
             <a:r>
               <a:rPr lang="de-DE" sz="1100" dirty="0">
                 <a:solidFill>
                   <a:srgbClr val="63666A"/>
                 </a:solidFill>
               </a:rPr>
-              <a:t>25 Farringdon Street</a:t>
+              <a:t/>
             </a:r>
-            <a:br>
-              <a:rPr lang="de-DE" sz="1100" dirty="0">
-                <a:solidFill>
-                  <a:srgbClr val="63666A"/>
-                </a:solidFill>
-              </a:rPr>
-            </a:br>
+          </a:p>
+          <a:p>
             <a:r>
               <a:rPr lang="de-DE" sz="1100" dirty="0">
                 <a:solidFill>
                   <a:srgbClr val="63666A"/>
                 </a:solidFill>
               </a:rPr>
-              <a:t>London</a:t>
+              <a:t>rsmuk.com</a:t>
             </a:r>
-            <a:br>
-              <a:rPr lang="de-DE" sz="1100" dirty="0">
-                <a:solidFill>
-                  <a:srgbClr val="63666A"/>
-                </a:solidFill>
-              </a:rPr>
-            </a:br>
+          </a:p>
+          <a:p>
             <a:r>
               <a:rPr lang="de-DE" sz="1100" dirty="0">
                 <a:solidFill>
                   <a:srgbClr val="63666A"/>
                 </a:solidFill>
               </a:rPr>
-              <a:t>EC4A 4AB</a:t>
+              <a:t/>
             </a:r>
-            <a:endParaRPr lang="en-GB" sz="1100" dirty="0">
-              <a:solidFill>
-                <a:srgbClr val="63666A"/>
-              </a:solidFill>
-            </a:endParaRPr>
-          </a:p>
-          <a:p>
-            <a:endParaRPr lang="en-GB" sz="1400" b="1" dirty="0" smtClean="0">
-              <a:solidFill>
-                <a:srgbClr val="63666A"/>
-              </a:solidFill>
-            </a:endParaRPr>
           </a:p>
           <a:p>
             <a:r>
-              <a:rPr lang="en-GB" sz="1400" b="1" dirty="0" smtClean="0">
+              <a:rPr lang="de-DE" sz="1100" dirty="0">
                 <a:solidFill>
                   <a:srgbClr val="63666A"/>
                 </a:solidFill>
               </a:rPr>
-              <a:t>rsmuk.com</a:t>
+              <a:t>Le groupe de sociétés et de LLP au Royaume-Uni exerçant sous le nom de RSM est membre du réseau RSM. RSM est le nom commercial utilisé par les membres du réseau RSM. Chaque membre du réseau RSM est un cabinet d'expertise comptable et de conseil indépendant, exerçant chacun en son nom propre. Le réseau RSM n'est pas lui-même une entité juridique distincte de quelque nature que ce soit, dans quelque juridiction que ce soit. Le réseau RSM est administré par RSM International Limited, une société immatriculée en Angleterre et au pays de Galles (numéro de société 4040598) dont le siège social est situé au 11 Old Jewry, Londres EC2R 8DU. La marque et le nom commercial RSM ainsi que les autres droits de propriété intellectuelle utilisés par les membres du réseau sont la propriété de RSM International Association, une association régie par les articles 60 et suivants du Code civil suisse, dont le siège est à Zoug.</a:t>
             </a:r>
           </a:p>
           <a:p>
-            <a:endParaRPr lang="en-GB" sz="1400" b="1" dirty="0">
-              <a:solidFill>
-                <a:srgbClr val="63666A"/>
-              </a:solidFill>
-            </a:endParaRPr>
-          </a:p>
-          <a:p>
             <a:r>
-              <a:rPr lang="en-US" sz="1000" dirty="0" smtClean="0"/>
-              <a:t>Le </a:t>
-            </a:r>
-            <a:r>
-              <a:rPr lang="en-US" sz="1000" dirty="0"/>
-              <a:t>groupe de sociétés et LLP du Royaume-Uni opérant sous le nom RSM est membre du réseau RSM. RSM est le nom commercial utilisé par les membres du réseau RSM. Chaque membre du réseau RSM est un cabinet indépendant de comptabilité et de conseil qui </a:t>
-            </a:r>
-            <a:r>
-              <a:rPr lang="en-US" sz="1000" dirty="0" err="1"/>
-              <a:t>exerce</a:t>
-            </a:r>
-            <a:r>
-              <a:rPr lang="en-US" sz="1000" dirty="0"/>
-              <a:t> en son propre nom. Le réseau RSM n'est pas en lui-même une entité juridique distincte d'une quelconque nature dans quelque juridiction que ce soit. Le réseau RSM est administré par RSM International Limited, une société enregistrée en Angleterre et au Pays de Galles (numéro d'entreprise 4040598) dont le siège social est au 11 Old Jewry, London EC2R 8DU. La marque et le nom commercial RSM ainsi que les autres droits de propriété intellectuelle utilisés par les membres du réseau appartiennent à RSM International Association, une association régie par les articles 60 et </a:t>
-            </a:r>
-            <a:r>
-              <a:rPr lang="en-US" sz="1000" dirty="0" err="1"/>
-              <a:t>suivants</a:t>
-            </a:r>
-            <a:r>
-              <a:rPr lang="en-US" sz="1000" dirty="0"/>
-              <a:t> du Code civil suisse dont le siège est à Zoug.</a:t>
-            </a:r>
-          </a:p>
-          <a:p>
-            <a:endParaRPr lang="en-US" sz="1000" dirty="0"/>
-          </a:p>
-          <a:p>
-            <a:r>
-              <a:rPr lang="en-US" sz="1000" dirty="0"/>
-              <a:t>RSM UK Consulting LLP, RSM Corporate Finance LLP, RSM Restructuring Advisory LLP, RSM Risk Assurance Services LLP, RSM Tax and Advisory Services LLP, RSM UK Audit LLP et RSM UK Tax and Accounting Limited ne sont pas </a:t>
-            </a:r>
-            <a:r>
-              <a:rPr lang="en-US" sz="1000" dirty="0" err="1"/>
-              <a:t>agréés</a:t>
-            </a:r>
-            <a:r>
-              <a:rPr lang="en-US" sz="1000" dirty="0"/>
-              <a:t> au titre du Financial Services and Markets Act 2000, mais nous sommes en mesure, dans certaines circonstances, d'offrir une gamme limitée de services d'investissement car nous sommes membres de l'Institute of Chartered Accountants in England and Wales. Nous pouvons fournir ces services d'investissement s'ils constituent une partie accessoire des services professionnels pour lesquels nous avons été mandatés. Baker Tilly Creditor Services LLP est </a:t>
-            </a:r>
-            <a:r>
-              <a:rPr lang="en-US" sz="1000" dirty="0" err="1"/>
-              <a:t>agréée</a:t>
-            </a:r>
-            <a:r>
-              <a:rPr lang="en-US" sz="1000" dirty="0"/>
-              <a:t> et réglementée par la Financial Conduct Authority pour les activités réglementées liées au crédit. RSM Co (UK) Limited est </a:t>
-            </a:r>
-            <a:r>
-              <a:rPr lang="en-US" sz="1000" dirty="0" err="1"/>
-              <a:t>agréée</a:t>
-            </a:r>
-            <a:r>
-              <a:rPr lang="en-US" sz="1000" dirty="0"/>
-              <a:t> et réglementée par la Financial Conduct Authority pour exercer une gamme d'activités de services d'investissement. </a:t>
-            </a:r>
-            <a:r>
-              <a:rPr lang="en-US" sz="1000" dirty="0" smtClean="0"/>
-              <a:t>Activités. </a:t>
-            </a:r>
-            <a:r>
-              <a:rPr lang="en-US" sz="1000" dirty="0"/>
-              <a:t>Bien que tous les efforts aient été déployés pour garantir l'exactitude des informations, celles contenues dans cette communication peuvent ne pas être exhaustives et les destinataires ne devraient pas agir sur leur base sans avoir préalablement consulté un conseiller professionnel</a:t>
-            </a:r>
-            <a:r>
-              <a:rPr lang="en-US" sz="1000" dirty="0" smtClean="0"/>
-              <a:t>.</a:t>
-            </a:r>
-          </a:p>
-          <a:p>
-            <a:endParaRPr lang="en-US" sz="1000" dirty="0" smtClean="0"/>
-          </a:p>
-          <a:p>
-            <a:r>
-              <a:rPr lang="en-US" sz="1000" dirty="0" smtClean="0"/>
-              <a:t>© </a:t>
-            </a:r>
-            <a:r>
-              <a:rPr lang="en-US" sz="1000" dirty="0"/>
-              <a:t>2016 RSM UK Group LLP, tous droits </a:t>
-            </a:r>
-            <a:r>
-              <a:rPr lang="en-US" sz="1000" dirty="0" smtClean="0"/>
-              <a:t>réservés</a:t>
-            </a:r>
-            <a:r>
-              <a:rPr lang="en-GB" sz="1000" dirty="0" smtClean="0">
+              <a:rPr lang="de-DE" sz="1100" dirty="0">
                 <a:solidFill>
                   <a:srgbClr val="63666A"/>
                 </a:solidFill>
               </a:rPr>
-              <a:t>.</a:t>
+              <a:t/>
+            </a:r>
+          </a:p>
+          <a:p>
+            <a:r>
+              <a:rPr lang="de-DE" sz="1100" dirty="0">
+                <a:solidFill>
+                  <a:srgbClr val="63666A"/>
+                </a:solidFill>
+              </a:rPr>
+              <a:t>RSM UK Consulting LLP, RSM Corporate Finance LLP, RSM Restructuring Advisory LLP, RSM Risk Assurance Services LLP, RSM Tax and Advisory Services LLP, RSM UK Audit LLP et RSM UK Tax and Accounting Limited ne sont pas agréés au titre du Financial Services and Markets Act 2000, mais nous sommes en mesure, dans certaines circonstances, de proposer une gamme limitée de services d'investissement, car nous sommes membres de l'Institute of Chartered Accountants in England and Wales. Nous pouvons fournir ces services d'investissement lorsqu'ils constituent un élément accessoire des services professionnels pour lesquels nous avons été mandatés. Baker Tilly Creditor Services LLP est agréé et réglementé par la Financial Conduct Authority pour les activités réglementées liées au crédit. RSM Co (UK) Limited est agréé et réglementé par la Financial Conduct Authority pour exercer une gamme d'activités d'investissement. Bien que tout ait été mis en œuvre pour en garantir l'exactitude, les informations contenues dans la présente communication peuvent ne pas être exhaustives et les destinataires ne devraient pas agir sur cette base sans conseil professionnel.</a:t>
+            </a:r>
+          </a:p>
+          <a:p>
+            <a:r>
+              <a:rPr lang="de-DE" sz="1100" dirty="0">
+                <a:solidFill>
+                  <a:srgbClr val="63666A"/>
+                </a:solidFill>
+              </a:rPr>
+              <a:t/>
+            </a:r>
+          </a:p>
+          <a:p>
+            <a:r>
+              <a:rPr lang="de-DE" sz="1100" dirty="0">
+                <a:solidFill>
+                  <a:srgbClr val="63666A"/>
+                </a:solidFill>
+              </a:rPr>
+              <a:t>© 2016 RSM UK Group LLP, tous droits réservés.</a:t>
             </a:r>
           </a:p>
         </p:txBody>
@@ -18009,7 +17879,6 @@
           <a:bodyPr/>
           <a:lstStyle/>
           <a:p>
-            <a:pPr lvl="0"/>
             <a:r>
               <a:rPr lang="en-US" sz="1000" b="1" dirty="0" smtClean="0">
                 <a:solidFill>
@@ -18020,46 +17889,34 @@
             </a:r>
           </a:p>
           <a:p>
-            <a:pPr lvl="0"/>
             <a:r>
-              <a:rPr lang="en-US" sz="1000" dirty="0" smtClean="0">
+              <a:rPr lang="en-US" sz="1000" b="1" dirty="0" smtClean="0">
                 <a:solidFill>
-                  <a:schemeClr val="accent2"/>
+                  <a:schemeClr val="accent1"/>
                 </a:solidFill>
               </a:rPr>
-              <a:t>Associé, Conseil en technologie</a:t>
+              <a:t>Associé, Technology Consulting</a:t>
             </a:r>
           </a:p>
           <a:p>
-            <a:pPr lvl="0"/>
             <a:r>
-              <a:rPr lang="en-US" sz="1000" dirty="0"/>
-              <a:t>r</a:t>
-            </a:r>
-            <a:r>
-              <a:rPr lang="en-US" sz="1000" dirty="0" smtClean="0">
+              <a:rPr lang="en-US" sz="1000" b="1" dirty="0" smtClean="0">
                 <a:solidFill>
-                  <a:schemeClr val="accent2"/>
+                  <a:schemeClr val="accent1"/>
                 </a:solidFill>
               </a:rPr>
-              <a:t>oger.lovis@rsmuk.com</a:t>
+              <a:t>roger.lovis@rsmuk.com</a:t>
             </a:r>
           </a:p>
           <a:p>
-            <a:pPr lvl="0"/>
             <a:r>
-              <a:rPr lang="en-US" sz="1000" dirty="0" smtClean="0">
+              <a:rPr lang="en-US" sz="1000" b="1" dirty="0" smtClean="0">
                 <a:solidFill>
-                  <a:schemeClr val="accent2"/>
+                  <a:schemeClr val="accent1"/>
                 </a:solidFill>
               </a:rPr>
-              <a:t>T: (0)7976 855126</a:t>
+              <a:t>T : (0)7976 855126</a:t>
             </a:r>
-            <a:endParaRPr lang="en-US" sz="1000" dirty="0">
-              <a:solidFill>
-                <a:schemeClr val="accent2"/>
-              </a:solidFill>
-            </a:endParaRPr>
           </a:p>
         </p:txBody>
       </p:sp>
@@ -18213,9 +18070,8 @@
           <a:p>
             <a:r>
               <a:rPr lang="en-GB" dirty="0" smtClean="0"/>
-              <a:t>Que se passe-t-il dans le monde ?</a:t>
+              <a:t>Que se passe-t-il là-dehors ?</a:t>
             </a:r>
-            <a:endParaRPr lang="en-GB" dirty="0"/>
           </a:p>
         </p:txBody>
       </p:sp>
@@ -18511,30 +18367,12 @@
           </a:bodyPr>
           <a:lstStyle/>
           <a:p>
-            <a:pPr algn="ctr">
-              <a:defRPr/>
-            </a:pPr>
             <a:r>
               <a:rPr lang="en-US" b="1" kern="0" dirty="0" smtClean="0">
                 <a:latin typeface="Calibri"/>
               </a:rPr>
-              <a:t>Big Data &amp; Analy</a:t>
+              <a:t>Big Data et analytique</a:t>
             </a:r>
-            <a:r>
-              <a:rPr lang="en-US" b="1" kern="0" dirty="0" smtClean="0">
-                <a:solidFill>
-                  <a:sysClr val="windowText" lastClr="000000"/>
-                </a:solidFill>
-                <a:latin typeface="Calibri"/>
-              </a:rPr>
-              <a:t>tics</a:t>
-            </a:r>
-            <a:endParaRPr lang="en-US" b="1" kern="0" dirty="0">
-              <a:solidFill>
-                <a:sysClr val="windowText" lastClr="000000"/>
-              </a:solidFill>
-              <a:latin typeface="Calibri"/>
-            </a:endParaRPr>
           </a:p>
         </p:txBody>
       </p:sp>
@@ -18560,18 +18398,12 @@
           </a:bodyPr>
           <a:lstStyle/>
           <a:p>
-            <a:pPr>
-              <a:defRPr/>
-            </a:pPr>
             <a:r>
               <a:rPr lang="en-US" b="1" kern="0" dirty="0" smtClean="0">
                 <a:latin typeface="Calibri"/>
               </a:rPr>
               <a:t>Travail mobile</a:t>
             </a:r>
-            <a:endParaRPr lang="en-US" b="1" kern="0" dirty="0">
-              <a:latin typeface="Calibri"/>
-            </a:endParaRPr>
           </a:p>
         </p:txBody>
       </p:sp>
@@ -18597,18 +18429,12 @@
           </a:bodyPr>
           <a:lstStyle/>
           <a:p>
-            <a:pPr algn="ctr">
-              <a:defRPr/>
-            </a:pPr>
             <a:r>
               <a:rPr lang="en-US" b="1" kern="0" dirty="0" smtClean="0">
                 <a:latin typeface="Calibri"/>
               </a:rPr>
-              <a:t>Le Cloud</a:t>
+              <a:t>Le cloud</a:t>
             </a:r>
-            <a:endParaRPr lang="en-US" b="1" kern="0" dirty="0">
-              <a:latin typeface="Calibri"/>
-            </a:endParaRPr>
           </a:p>
         </p:txBody>
       </p:sp>
@@ -18634,18 +18460,12 @@
           </a:bodyPr>
           <a:lstStyle/>
           <a:p>
-            <a:pPr>
-              <a:defRPr/>
-            </a:pPr>
             <a:r>
               <a:rPr lang="en-US" b="1" kern="0" dirty="0" smtClean="0">
                 <a:latin typeface="Calibri"/>
               </a:rPr>
-              <a:t>Médias sociaux</a:t>
+              <a:t>Réseaux sociaux</a:t>
             </a:r>
-            <a:endParaRPr lang="en-US" b="1" kern="0" dirty="0">
-              <a:latin typeface="Calibri"/>
-            </a:endParaRPr>
           </a:p>
         </p:txBody>
       </p:sp>
@@ -19223,23 +19043,6 @@
           </a:bodyPr>
           <a:lstStyle/>
           <a:p>
-            <a:pPr marL="266700" marR="0" lvl="0" indent="0" defTabSz="1019175" eaLnBrk="1" fontAlgn="base" latinLnBrk="0" hangingPunct="1">
-              <a:lnSpc>
-                <a:spcPct val="100000"/>
-              </a:lnSpc>
-              <a:spcBef>
-                <a:spcPts val="600"/>
-              </a:spcBef>
-              <a:spcAft>
-                <a:spcPts val="600"/>
-              </a:spcAft>
-              <a:buClrTx/>
-              <a:buSzTx/>
-              <a:buFontTx/>
-              <a:buNone/>
-              <a:tabLst/>
-              <a:defRPr/>
-            </a:pPr>
             <a:r>
               <a:rPr kumimoji="0" lang="en-GB" sz="1800" b="1" i="0" u="none" strike="noStrike" kern="0" cap="none" spc="0" normalizeH="0" baseline="0" noProof="0" dirty="0" smtClean="0">
                 <a:ln>
@@ -19255,29 +19058,12 @@
                 <a:ea typeface="+mn-ea"/>
                 <a:cs typeface="Arial" charset="0"/>
               </a:rPr>
-              <a:t>Comment puis-je utiliser la technologie pour...</a:t>
+              <a:t>Comment puis-je utiliser la technologie pour…</a:t>
             </a:r>
           </a:p>
           <a:p>
-            <a:pPr marL="285750" marR="0" lvl="0" indent="-285750" defTabSz="1019175" eaLnBrk="1" fontAlgn="base" latinLnBrk="0" hangingPunct="1">
-              <a:lnSpc>
-                <a:spcPct val="100000"/>
-              </a:lnSpc>
-              <a:spcBef>
-                <a:spcPts val="600"/>
-              </a:spcBef>
-              <a:spcAft>
-                <a:spcPts val="600"/>
-              </a:spcAft>
-              <a:buClrTx/>
-              <a:buSzTx/>
-              <a:buFont typeface="Wingdings" pitchFamily="2" charset="2"/>
-              <a:buChar char="ü"/>
-              <a:tabLst/>
-              <a:defRPr/>
-            </a:pPr>
             <a:r>
-              <a:rPr kumimoji="0" lang="en-GB" sz="1400" b="0" i="0" u="none" strike="noStrike" kern="0" cap="none" spc="0" normalizeH="0" baseline="0" noProof="0" dirty="0" smtClean="0">
+              <a:rPr kumimoji="0" lang="en-GB" sz="1800" b="1" i="0" u="none" strike="noStrike" kern="0" cap="none" spc="0" normalizeH="0" baseline="0" noProof="0" dirty="0" smtClean="0">
                 <a:ln>
                   <a:noFill/>
                 </a:ln>
@@ -19289,31 +19075,14 @@
                 <a:uFillTx/>
                 <a:latin typeface="Calibri"/>
                 <a:ea typeface="+mn-ea"/>
-                <a:cs typeface="+mn-cs"/>
+                <a:cs typeface="Arial" charset="0"/>
               </a:rPr>
               <a:t>Améliorer le service ?</a:t>
             </a:r>
           </a:p>
           <a:p>
-            <a:pPr marL="285750" marR="0" lvl="0" indent="-285750" defTabSz="1019175" eaLnBrk="1" fontAlgn="base" latinLnBrk="0" hangingPunct="1">
-              <a:lnSpc>
-                <a:spcPct val="100000"/>
-              </a:lnSpc>
-              <a:spcBef>
-                <a:spcPts val="600"/>
-              </a:spcBef>
-              <a:spcAft>
-                <a:spcPts val="600"/>
-              </a:spcAft>
-              <a:buClrTx/>
-              <a:buSzTx/>
-              <a:buFont typeface="Wingdings" pitchFamily="2" charset="2"/>
-              <a:buChar char="ü"/>
-              <a:tabLst/>
-              <a:defRPr/>
-            </a:pPr>
             <a:r>
-              <a:rPr kumimoji="0" lang="en-GB" sz="1400" b="0" i="0" u="none" strike="noStrike" kern="0" cap="none" spc="0" normalizeH="0" baseline="0" noProof="0" dirty="0" smtClean="0">
+              <a:rPr kumimoji="0" lang="en-GB" sz="1800" b="1" i="0" u="none" strike="noStrike" kern="0" cap="none" spc="0" normalizeH="0" baseline="0" noProof="0" dirty="0" smtClean="0">
                 <a:ln>
                   <a:noFill/>
                 </a:ln>
@@ -19325,31 +19094,14 @@
                 <a:uFillTx/>
                 <a:latin typeface="Calibri"/>
                 <a:ea typeface="+mn-ea"/>
-                <a:cs typeface="+mn-cs"/>
+                <a:cs typeface="Arial" charset="0"/>
               </a:rPr>
               <a:t>Maîtriser les coûts ?</a:t>
             </a:r>
           </a:p>
           <a:p>
-            <a:pPr marL="285750" marR="0" lvl="0" indent="-285750" defTabSz="1019175" eaLnBrk="1" fontAlgn="base" latinLnBrk="0" hangingPunct="1">
-              <a:lnSpc>
-                <a:spcPct val="100000"/>
-              </a:lnSpc>
-              <a:spcBef>
-                <a:spcPts val="600"/>
-              </a:spcBef>
-              <a:spcAft>
-                <a:spcPts val="600"/>
-              </a:spcAft>
-              <a:buClrTx/>
-              <a:buSzTx/>
-              <a:buFont typeface="Wingdings" pitchFamily="2" charset="2"/>
-              <a:buChar char="ü"/>
-              <a:tabLst/>
-              <a:defRPr/>
-            </a:pPr>
             <a:r>
-              <a:rPr kumimoji="0" lang="en-GB" sz="1400" b="0" i="0" u="none" strike="noStrike" kern="0" cap="none" spc="0" normalizeH="0" baseline="0" noProof="0" dirty="0" smtClean="0">
+              <a:rPr kumimoji="0" lang="en-GB" sz="1800" b="1" i="0" u="none" strike="noStrike" kern="0" cap="none" spc="0" normalizeH="0" baseline="0" noProof="0" dirty="0" smtClean="0">
                 <a:ln>
                   <a:noFill/>
                 </a:ln>
@@ -19361,31 +19113,14 @@
                 <a:uFillTx/>
                 <a:latin typeface="Calibri"/>
                 <a:ea typeface="+mn-ea"/>
-                <a:cs typeface="+mn-cs"/>
+                <a:cs typeface="Arial" charset="0"/>
               </a:rPr>
-              <a:t>Contrôler les opérations ?</a:t>
+              <a:t>Piloter les opérations ?</a:t>
             </a:r>
           </a:p>
           <a:p>
-            <a:pPr marL="285750" marR="0" lvl="0" indent="-285750" defTabSz="1019175" eaLnBrk="1" fontAlgn="base" latinLnBrk="0" hangingPunct="1">
-              <a:lnSpc>
-                <a:spcPct val="100000"/>
-              </a:lnSpc>
-              <a:spcBef>
-                <a:spcPts val="600"/>
-              </a:spcBef>
-              <a:spcAft>
-                <a:spcPts val="600"/>
-              </a:spcAft>
-              <a:buClrTx/>
-              <a:buSzTx/>
-              <a:buFont typeface="Wingdings" pitchFamily="2" charset="2"/>
-              <a:buChar char="ü"/>
-              <a:tabLst/>
-              <a:defRPr/>
-            </a:pPr>
             <a:r>
-              <a:rPr kumimoji="0" lang="en-GB" sz="1400" b="0" i="0" u="none" strike="noStrike" kern="0" cap="none" spc="0" normalizeH="0" baseline="0" noProof="0" dirty="0" smtClean="0">
+              <a:rPr kumimoji="0" lang="en-GB" sz="1800" b="1" i="0" u="none" strike="noStrike" kern="0" cap="none" spc="0" normalizeH="0" baseline="0" noProof="0" dirty="0" smtClean="0">
                 <a:ln>
                   <a:noFill/>
                 </a:ln>
@@ -19397,76 +19132,48 @@
                 <a:uFillTx/>
                 <a:latin typeface="Calibri"/>
                 <a:ea typeface="+mn-ea"/>
-                <a:cs typeface="+mn-cs"/>
+                <a:cs typeface="Arial" charset="0"/>
               </a:rPr>
               <a:t>Collaborer ?</a:t>
             </a:r>
           </a:p>
           <a:p>
-            <a:pPr marL="1200150" marR="0" lvl="2" indent="-285750" defTabSz="1019175" eaLnBrk="1" fontAlgn="base" latinLnBrk="0" hangingPunct="1">
-              <a:lnSpc>
-                <a:spcPct val="100000"/>
-              </a:lnSpc>
-              <a:spcBef>
-                <a:spcPts val="600"/>
-              </a:spcBef>
-              <a:spcAft>
-                <a:spcPts val="600"/>
-              </a:spcAft>
-              <a:buClrTx/>
-              <a:buSzTx/>
-              <a:buFont typeface="Wingdings" pitchFamily="2" charset="2"/>
-              <a:buChar char="ü"/>
-              <a:tabLst/>
-              <a:defRPr/>
-            </a:pPr>
-            <a:endParaRPr kumimoji="0" lang="en-GB" sz="1400" b="0" i="0" u="none" strike="noStrike" kern="0" cap="none" spc="0" normalizeH="0" baseline="0" noProof="0" dirty="0" smtClean="0">
-              <a:ln>
-                <a:noFill/>
-              </a:ln>
-              <a:solidFill>
-                <a:schemeClr val="bg1"/>
-              </a:solidFill>
-              <a:effectLst/>
-              <a:uLnTx/>
-              <a:uFillTx/>
-              <a:latin typeface="Calibri"/>
-              <a:ea typeface="+mn-ea"/>
-              <a:cs typeface="+mn-cs"/>
-            </a:endParaRPr>
-          </a:p>
-          <a:p>
-            <a:pPr marL="0" marR="0" lvl="0" indent="0" defTabSz="1019175" eaLnBrk="1" fontAlgn="base" latinLnBrk="0" hangingPunct="1">
-              <a:lnSpc>
-                <a:spcPct val="100000"/>
-              </a:lnSpc>
-              <a:spcBef>
-                <a:spcPts val="600"/>
-              </a:spcBef>
-              <a:spcAft>
-                <a:spcPts val="600"/>
-              </a:spcAft>
-              <a:buClrTx/>
-              <a:buSzTx/>
-              <a:buFontTx/>
-              <a:buNone/>
-              <a:tabLst/>
-              <a:defRPr/>
-            </a:pPr>
-            <a:endParaRPr kumimoji="0" lang="en-GB" sz="1800" b="0" i="0" u="none" strike="noStrike" kern="0" cap="none" spc="0" normalizeH="0" baseline="0" noProof="0" dirty="0" smtClean="0">
-              <a:ln>
-                <a:noFill/>
-              </a:ln>
-              <a:solidFill>
-                <a:schemeClr val="bg1"/>
-              </a:solidFill>
-              <a:effectLst/>
-              <a:uLnTx/>
-              <a:uFillTx/>
-              <a:latin typeface="Calibri"/>
-              <a:ea typeface="+mn-ea"/>
-              <a:cs typeface="Arial" charset="0"/>
-            </a:endParaRPr>
+            <a:r>
+              <a:rPr kumimoji="0" lang="en-GB" sz="1800" b="1" i="0" u="none" strike="noStrike" kern="0" cap="none" spc="0" normalizeH="0" baseline="0" noProof="0" dirty="0" smtClean="0">
+                <a:ln>
+                  <a:noFill/>
+                </a:ln>
+                <a:solidFill>
+                  <a:schemeClr val="bg1"/>
+                </a:solidFill>
+                <a:effectLst/>
+                <a:uLnTx/>
+                <a:uFillTx/>
+                <a:latin typeface="Calibri"/>
+                <a:ea typeface="+mn-ea"/>
+                <a:cs typeface="Arial" charset="0"/>
+              </a:rPr>
+              <a:t/>
+            </a:r>
+          </a:p>
+          <a:p>
+            <a:r>
+              <a:rPr kumimoji="0" lang="en-GB" sz="1800" b="1" i="0" u="none" strike="noStrike" kern="0" cap="none" spc="0" normalizeH="0" baseline="0" noProof="0" dirty="0" smtClean="0">
+                <a:ln>
+                  <a:noFill/>
+                </a:ln>
+                <a:solidFill>
+                  <a:schemeClr val="bg1"/>
+                </a:solidFill>
+                <a:effectLst/>
+                <a:uLnTx/>
+                <a:uFillTx/>
+                <a:latin typeface="Calibri"/>
+                <a:ea typeface="+mn-ea"/>
+                <a:cs typeface="Arial" charset="0"/>
+              </a:rPr>
+              <a:t/>
+            </a:r>
           </a:p>
         </p:txBody>
       </p:sp>
@@ -19551,18 +19258,12 @@
           </a:bodyPr>
           <a:lstStyle/>
           <a:p>
-            <a:pPr algn="ctr">
-              <a:defRPr/>
-            </a:pPr>
             <a:r>
               <a:rPr lang="en-US" b="1" kern="0" dirty="0" smtClean="0">
                 <a:latin typeface="Calibri"/>
               </a:rPr>
               <a:t>Internet des objets</a:t>
             </a:r>
-            <a:endParaRPr lang="en-US" b="1" kern="0" dirty="0">
-              <a:latin typeface="Calibri"/>
-            </a:endParaRPr>
           </a:p>
         </p:txBody>
       </p:sp>
@@ -19629,18 +19330,12 @@
           </a:bodyPr>
           <a:lstStyle/>
           <a:p>
-            <a:pPr algn="ctr">
-              <a:defRPr/>
-            </a:pPr>
             <a:r>
               <a:rPr lang="en-US" b="1" kern="0" dirty="0" smtClean="0">
                 <a:latin typeface="Calibri"/>
               </a:rPr>
-              <a:t>Transactions en ligne</a:t>
+              <a:t>Transactions sur Internet</a:t>
             </a:r>
-            <a:endParaRPr lang="en-US" b="1" kern="0" dirty="0">
-              <a:latin typeface="Calibri"/>
-            </a:endParaRPr>
           </a:p>
         </p:txBody>
       </p:sp>
@@ -19732,7 +19427,6 @@
               <a:rPr lang="en-GB" dirty="0" smtClean="0"/>
               <a:t>Grandes tendances</a:t>
             </a:r>
-            <a:endParaRPr lang="en-GB" dirty="0"/>
           </a:p>
         </p:txBody>
       </p:sp>
@@ -19774,12 +19468,10 @@
           <a:bodyPr lIns="0" rIns="0" rtlCol="0" anchor="ctr"/>
           <a:lstStyle/>
           <a:p>
-            <a:pPr algn="ctr"/>
             <a:r>
               <a:rPr lang="en-GB" sz="1600" dirty="0" smtClean="0"/>
               <a:t>Personnalisation</a:t>
             </a:r>
-            <a:endParaRPr lang="en-GB" sz="1600" dirty="0"/>
           </a:p>
         </p:txBody>
       </p:sp>
@@ -19821,12 +19513,10 @@
           <a:bodyPr lIns="0" rIns="0" rtlCol="0" anchor="ctr"/>
           <a:lstStyle/>
           <a:p>
-            <a:pPr algn="ctr"/>
             <a:r>
               <a:rPr lang="en-GB" sz="1600" dirty="0" smtClean="0"/>
               <a:t>Automatisation</a:t>
             </a:r>
-            <a:endParaRPr lang="en-GB" sz="1600" dirty="0"/>
           </a:p>
         </p:txBody>
       </p:sp>
@@ -19868,12 +19558,10 @@
           <a:bodyPr lIns="0" rIns="0" rtlCol="0" anchor="ctr"/>
           <a:lstStyle/>
           <a:p>
-            <a:pPr algn="ctr"/>
             <a:r>
               <a:rPr lang="en-GB" sz="1600" dirty="0" smtClean="0"/>
               <a:t>Rapidité et agilité</a:t>
             </a:r>
-            <a:endParaRPr lang="en-GB" sz="1600" dirty="0"/>
           </a:p>
         </p:txBody>
       </p:sp>
@@ -19915,12 +19603,10 @@
           <a:bodyPr lIns="0" rIns="0" rtlCol="0" anchor="ctr"/>
           <a:lstStyle/>
           <a:p>
-            <a:pPr algn="ctr"/>
             <a:r>
               <a:rPr lang="en-GB" sz="1600" dirty="0" smtClean="0"/>
               <a:t>Évolutivité</a:t>
             </a:r>
-            <a:endParaRPr lang="en-GB" sz="1600" dirty="0"/>
           </a:p>
         </p:txBody>
       </p:sp>
@@ -19962,12 +19648,10 @@
           <a:bodyPr lIns="0" rIns="0" rtlCol="0" anchor="ctr"/>
           <a:lstStyle/>
           <a:p>
-            <a:pPr algn="ctr"/>
             <a:r>
               <a:rPr lang="en-GB" sz="1600" dirty="0" smtClean="0"/>
-              <a:t>Infrastructure sur site vs cloud</a:t>
+              <a:t>Sur site ou dans le cloud</a:t>
             </a:r>
-            <a:endParaRPr lang="en-GB" sz="1600" dirty="0"/>
           </a:p>
         </p:txBody>
       </p:sp>
@@ -20009,12 +19693,10 @@
           <a:bodyPr lIns="0" rIns="0" rtlCol="0" anchor="ctr"/>
           <a:lstStyle/>
           <a:p>
-            <a:pPr algn="ctr"/>
             <a:r>
               <a:rPr lang="en-GB" sz="1600" dirty="0" smtClean="0"/>
-              <a:t>Meilleure solution du marché vs plateforme intégrée unique</a:t>
+              <a:t>Meilleur de sa catégorie ou solution à plateforme unique</a:t>
             </a:r>
-            <a:endParaRPr lang="en-GB" sz="1600" dirty="0"/>
           </a:p>
         </p:txBody>
       </p:sp>
@@ -20103,12 +19785,10 @@
           <a:bodyPr lIns="0" rIns="0" rtlCol="0" anchor="ctr"/>
           <a:lstStyle/>
           <a:p>
-            <a:pPr algn="ctr"/>
             <a:r>
               <a:rPr lang="en-GB" sz="1600" dirty="0" smtClean="0"/>
-              <a:t>Perturbateurs</a:t>
+              <a:t>Disrupteurs</a:t>
             </a:r>
-            <a:endParaRPr lang="en-GB" sz="1600" dirty="0"/>
           </a:p>
         </p:txBody>
       </p:sp>
@@ -20150,12 +19830,10 @@
           <a:bodyPr lIns="0" rIns="0" rtlCol="0" anchor="ctr"/>
           <a:lstStyle/>
           <a:p>
-            <a:pPr algn="ctr"/>
             <a:r>
               <a:rPr lang="en-GB" sz="1600" dirty="0" smtClean="0"/>
-              <a:t>Accessibilité  « facilité d’utilisation »</a:t>
+              <a:t>Accessibilité – « facilité d'utilisation »</a:t>
             </a:r>
-            <a:endParaRPr lang="en-GB" sz="1600" dirty="0"/>
           </a:p>
         </p:txBody>
       </p:sp>
@@ -20215,17 +19893,8 @@
           <a:p>
             <a:r>
               <a:rPr lang="en-US" sz="3200" dirty="0" smtClean="0"/>
-              <a:t>Comment les outils numériques peuvent-ils aider mon </a:t>
+              <a:t>Comment les outils numériques peuvent-ils aider mon organisation à atteindre ses objectifs ?</a:t>
             </a:r>
-            <a:r>
-              <a:rPr lang="en-US" sz="3200" dirty="0" err="1" smtClean="0"/>
-              <a:t>organisation</a:t>
-            </a:r>
-            <a:r>
-              <a:rPr lang="en-US" sz="3200" dirty="0" smtClean="0"/>
-              <a:t> à atteindre nos objectifs ?</a:t>
-            </a:r>
-            <a:endParaRPr lang="en-US" sz="3200" dirty="0"/>
           </a:p>
         </p:txBody>
       </p:sp>
@@ -20285,7 +19954,6 @@
               <a:rPr lang="en-GB" dirty="0" smtClean="0"/>
               <a:t>Stratégie informatique</a:t>
             </a:r>
-            <a:endParaRPr lang="en-GB" dirty="0"/>
           </a:p>
         </p:txBody>
       </p:sp>
@@ -20345,25 +20013,8 @@
           <a:p>
             <a:r>
               <a:rPr lang="en-US" i="1" dirty="0" smtClean="0"/>
-              <a:t>…[les technologies </a:t>
+              <a:t>…les technologies [numériques] telles que les réseaux sociaux, la mobilité et l'analyse de données ne sont pas des objectifs à atteindre… [mais] des outils pour se rapprocher des clients, responsabiliser les collaborateurs et transformer les processus métier internes</a:t>
             </a:r>
-            <a:r>
-              <a:rPr lang="en-US" i="1" dirty="0"/>
-              <a:t>numériques] telles que les médias sociaux, la mobilité et l'analyse de données ne sont pas des objectifs à </a:t>
-            </a:r>
-            <a:r>
-              <a:rPr lang="en-US" i="1" dirty="0" smtClean="0"/>
-              <a:t>atteindre…[</a:t>
-            </a:r>
-            <a:r>
-              <a:rPr lang="en-US" i="1" dirty="0"/>
-              <a:t>mais] sont des outils pour se rapprocher des clients, responsabiliser les collaborateurs et transformer les processus </a:t>
-            </a:r>
-            <a:r>
-              <a:rPr lang="en-US" i="1" dirty="0" smtClean="0"/>
-              <a:t>métier internes </a:t>
-            </a:r>
-            <a:endParaRPr lang="en-US" i="1" dirty="0"/>
           </a:p>
         </p:txBody>
       </p:sp>
@@ -20524,83 +20175,14 @@
             </a:lvl9pPr>
           </a:lstStyle>
           <a:p>
-            <a:pPr marL="0" indent="0" algn="ctr">
-              <a:buNone/>
-            </a:pPr>
             <a:r>
               <a:rPr lang="en-US" sz="1400" b="1" dirty="0" err="1" smtClean="0">
                 <a:solidFill>
                   <a:schemeClr val="bg1"/>
                 </a:solidFill>
               </a:rPr>
-              <a:t>Westman</a:t>
+              <a:t>Westman, Bonnie et McAfee, « Leading Digital: Turning Technology into Business Transformation » (HBR, 2014)</a:t>
             </a:r>
-            <a:r>
-              <a:rPr lang="en-US" sz="1400" b="1" dirty="0">
-                <a:solidFill>
-                  <a:schemeClr val="bg1"/>
-                </a:solidFill>
-              </a:rPr>
-              <a:t>, Bonnie et </a:t>
-            </a:r>
-            <a:r>
-              <a:rPr lang="en-US" sz="1400" b="1" dirty="0" smtClean="0">
-                <a:solidFill>
-                  <a:schemeClr val="bg1"/>
-                </a:solidFill>
-              </a:rPr>
-              <a:t>McAfee</a:t>
-            </a:r>
-            <a:r>
-              <a:rPr lang="en-US" sz="1400" dirty="0" smtClean="0">
-                <a:solidFill>
-                  <a:schemeClr val="bg1"/>
-                </a:solidFill>
-              </a:rPr>
-              <a:t>, </a:t>
-            </a:r>
-            <a:r>
-              <a:rPr lang="en-US" sz="1400" dirty="0" smtClean="0">
-                <a:solidFill>
-                  <a:schemeClr val="bg1"/>
-                </a:solidFill>
-                <a:latin typeface="+mj-lt"/>
-              </a:rPr>
-              <a:t>“</a:t>
-            </a:r>
-            <a:r>
-              <a:rPr lang="en-US" sz="1400" i="1" dirty="0" smtClean="0">
-                <a:solidFill>
-                  <a:schemeClr val="bg1"/>
-                </a:solidFill>
-                <a:latin typeface="+mj-lt"/>
-              </a:rPr>
-              <a:t>Leading Digital : Turning Technology into Business Transformation</a:t>
-            </a:r>
-            <a:r>
-              <a:rPr lang="en-US" sz="1400" dirty="0" smtClean="0">
-                <a:solidFill>
-                  <a:schemeClr val="bg1"/>
-                </a:solidFill>
-                <a:latin typeface="+mj-lt"/>
-              </a:rPr>
-              <a:t>” (</a:t>
-            </a:r>
-            <a:r>
-              <a:rPr lang="en-US" sz="1400" dirty="0">
-                <a:solidFill>
-                  <a:schemeClr val="bg1"/>
-                </a:solidFill>
-                <a:latin typeface="+mj-lt"/>
-              </a:rPr>
-              <a:t>HBR, 2014) </a:t>
-            </a:r>
-            <a:endParaRPr lang="en-GB" sz="1400" dirty="0">
-              <a:solidFill>
-                <a:schemeClr val="bg1"/>
-              </a:solidFill>
-              <a:latin typeface="+mj-lt"/>
-            </a:endParaRPr>
           </a:p>
         </p:txBody>
       </p:sp>
@@ -20658,9 +20240,8 @@
           <a:p>
             <a:r>
               <a:rPr lang="en-GB" dirty="0" smtClean="0"/>
-              <a:t>Piliers traditionnels de la stratégie informatique</a:t>
+              <a:t>Les piliers traditionnels de la stratégie informatique</a:t>
             </a:r>
-            <a:endParaRPr lang="en-GB" dirty="0"/>
           </a:p>
         </p:txBody>
       </p:sp>
@@ -20798,23 +20379,6 @@
             <a:bodyPr wrap="none" lIns="0" tIns="0" rIns="0" bIns="0" anchor="ctr"/>
             <a:lstStyle/>
             <a:p>
-              <a:pPr marL="0" marR="0" lvl="0" indent="0" algn="ctr" defTabSz="914400" eaLnBrk="1" fontAlgn="auto" latinLnBrk="0" hangingPunct="1">
-                <a:lnSpc>
-                  <a:spcPct val="80000"/>
-                </a:lnSpc>
-                <a:spcBef>
-                  <a:spcPct val="20000"/>
-                </a:spcBef>
-                <a:spcAft>
-                  <a:spcPts val="0"/>
-                </a:spcAft>
-                <a:buClrTx/>
-                <a:buSzTx/>
-                <a:buFont typeface="Wingdings 2" pitchFamily="18" charset="2"/>
-                <a:buNone/>
-                <a:tabLst/>
-                <a:defRPr/>
-              </a:pPr>
               <a:r>
                 <a:rPr kumimoji="0" lang="en-US" sz="1200" b="1" i="0" u="none" strike="noStrike" kern="0" cap="none" spc="0" normalizeH="0" baseline="0" noProof="0" dirty="0">
                   <a:ln>
@@ -20829,53 +20393,10 @@
                   <a:uLnTx/>
                   <a:uFillTx/>
                 </a:rPr>
-                <a:t>Personnel informatique </a:t>
+                <a:t>Personnel et support</a:t>
               </a:r>
             </a:p>
             <a:p>
-              <a:pPr marL="0" marR="0" lvl="0" indent="0" algn="ctr" defTabSz="914400" eaLnBrk="1" fontAlgn="auto" latinLnBrk="0" hangingPunct="1">
-                <a:lnSpc>
-                  <a:spcPct val="80000"/>
-                </a:lnSpc>
-                <a:spcBef>
-                  <a:spcPct val="20000"/>
-                </a:spcBef>
-                <a:spcAft>
-                  <a:spcPts val="0"/>
-                </a:spcAft>
-                <a:buClrTx/>
-                <a:buSzTx/>
-                <a:buFont typeface="Wingdings 2" pitchFamily="18" charset="2"/>
-                <a:buNone/>
-                <a:tabLst/>
-                <a:defRPr/>
-              </a:pPr>
-              <a:r>
-                <a:rPr lang="en-US" sz="1200" b="1" kern="0" dirty="0" smtClean="0">
-                  <a:solidFill>
-                    <a:srgbClr val="FFFFFF">
-                      <a:lumMod val="95000"/>
-                    </a:srgbClr>
-                  </a:solidFill>
-                </a:rPr>
-                <a:t>et</a:t>
-              </a:r>
-              <a:r>
-                <a:rPr kumimoji="0" lang="en-US" sz="1200" b="1" i="0" u="none" strike="noStrike" kern="0" cap="none" spc="0" normalizeH="0" baseline="0" noProof="0" dirty="0" smtClean="0">
-                  <a:ln>
-                    <a:noFill/>
-                  </a:ln>
-                  <a:solidFill>
-                    <a:srgbClr val="FFFFFF">
-                      <a:lumMod val="95000"/>
-                    </a:srgbClr>
-                  </a:solidFill>
-                  <a:effectLst/>
-                  <a:uLnTx/>
-                  <a:uFillTx/>
-                </a:rPr>
-                <a:t> </a:t>
-              </a:r>
               <a:r>
                 <a:rPr kumimoji="0" lang="en-US" sz="1200" b="1" i="0" u="none" strike="noStrike" kern="0" cap="none" spc="0" normalizeH="0" baseline="0" noProof="0" dirty="0">
                   <a:ln>
@@ -20890,7 +20411,7 @@
                   <a:uLnTx/>
                   <a:uFillTx/>
                 </a:rPr>
-                <a:t>Support</a:t>
+                <a:t>informatiques</a:t>
               </a:r>
             </a:p>
           </p:txBody>
@@ -20936,23 +20457,6 @@
             <a:bodyPr wrap="none" lIns="0" tIns="0" rIns="0" bIns="0" anchor="ctr"/>
             <a:lstStyle/>
             <a:p>
-              <a:pPr marL="0" marR="0" lvl="0" indent="0" algn="ctr" defTabSz="914400" eaLnBrk="1" fontAlgn="auto" latinLnBrk="0" hangingPunct="1">
-                <a:lnSpc>
-                  <a:spcPct val="100000"/>
-                </a:lnSpc>
-                <a:spcBef>
-                  <a:spcPts val="0"/>
-                </a:spcBef>
-                <a:spcAft>
-                  <a:spcPts val="0"/>
-                </a:spcAft>
-                <a:buClrTx/>
-                <a:buSzTx/>
-                <a:buFontTx/>
-                <a:buNone/>
-                <a:tabLst/>
-                <a:defRPr/>
-              </a:pPr>
               <a:r>
                 <a:rPr kumimoji="0" lang="en-US" sz="1200" b="1" i="0" u="none" strike="noStrike" kern="0" cap="none" spc="0" normalizeH="0" baseline="0" noProof="0" dirty="0">
                   <a:ln>
@@ -20972,67 +20476,25 @@
               </a:r>
             </a:p>
             <a:p>
-              <a:pPr marL="0" marR="0" lvl="0" indent="0" algn="ctr" defTabSz="914400" eaLnBrk="1" fontAlgn="auto" latinLnBrk="0" hangingPunct="1">
-                <a:lnSpc>
-                  <a:spcPct val="100000"/>
-                </a:lnSpc>
-                <a:spcBef>
-                  <a:spcPts val="0"/>
-                </a:spcBef>
-                <a:spcAft>
-                  <a:spcPts val="0"/>
-                </a:spcAft>
-                <a:buClrTx/>
-                <a:buSzTx/>
-                <a:buFontTx/>
-                <a:buNone/>
-                <a:tabLst/>
-                <a:defRPr/>
-              </a:pPr>
               <a:r>
-                <a:rPr lang="en-US" sz="1200" b="1" kern="0" dirty="0" smtClean="0">
+                <a:rPr kumimoji="0" lang="en-US" sz="1200" b="1" i="0" u="none" strike="noStrike" kern="0" cap="none" spc="0" normalizeH="0" baseline="0" noProof="0" dirty="0">
+                  <a:ln>
+                    <a:noFill/>
+                  </a:ln>
                   <a:solidFill>
                     <a:srgbClr val="FFFFFF">
                       <a:lumMod val="95000"/>
                     </a:srgbClr>
                   </a:solidFill>
+                  <a:effectLst/>
+                  <a:uLnTx/>
+                  <a:uFillTx/>
                   <a:cs typeface="Arial" pitchFamily="34" charset="0"/>
                 </a:rPr>
                 <a:t>et</a:t>
               </a:r>
-              <a:endParaRPr kumimoji="0" lang="en-US" sz="1200" b="1" i="0" u="none" strike="noStrike" kern="0" cap="none" spc="0" normalizeH="0" baseline="0" noProof="0" dirty="0">
-                <a:ln>
-                  <a:noFill/>
-                </a:ln>
-                <a:solidFill>
-                  <a:srgbClr val="FFFFFF">
-                    <a:lumMod val="95000"/>
-                  </a:srgbClr>
-                </a:solidFill>
-                <a:effectLst/>
-                <a:uLnTx/>
-                <a:uFillTx/>
-                <a:cs typeface="Arial" pitchFamily="34" charset="0"/>
-              </a:endParaRPr>
             </a:p>
             <a:p>
-              <a:pPr marL="0" marR="0" lvl="0" indent="0" algn="ctr" defTabSz="914400" eaLnBrk="1" fontAlgn="auto" latinLnBrk="0" hangingPunct="1">
-                <a:lnSpc>
-                  <a:spcPct val="100000"/>
-                </a:lnSpc>
-                <a:spcBef>
-                  <a:spcPts val="0"/>
-                </a:spcBef>
-                <a:spcAft>
-                  <a:spcPts val="0"/>
-                </a:spcAft>
-                <a:buClrTx/>
-                <a:buSzTx/>
-                <a:buFontTx/>
-                <a:buNone/>
-                <a:tabLst/>
-                <a:defRPr/>
-              </a:pPr>
               <a:r>
                 <a:rPr kumimoji="0" lang="en-US" sz="1200" b="1" i="0" u="none" strike="noStrike" kern="0" cap="none" spc="0" normalizeH="0" baseline="0" noProof="0" dirty="0">
                   <a:ln>
@@ -21302,23 +20764,6 @@
           </a:bodyPr>
           <a:lstStyle/>
           <a:p>
-            <a:pPr marL="0" marR="0" lvl="0" indent="0" algn="ctr" defTabSz="914400" eaLnBrk="1" fontAlgn="auto" latinLnBrk="0" hangingPunct="1">
-              <a:lnSpc>
-                <a:spcPct val="100000"/>
-              </a:lnSpc>
-              <a:spcBef>
-                <a:spcPts val="0"/>
-              </a:spcBef>
-              <a:spcAft>
-                <a:spcPts val="0"/>
-              </a:spcAft>
-              <a:buClrTx/>
-              <a:buSzTx/>
-              <a:buFontTx/>
-              <a:buNone/>
-              <a:tabLst/>
-              <a:defRPr/>
-            </a:pPr>
             <a:r>
               <a:rPr kumimoji="0" lang="en-US" sz="1200" b="1" i="0" u="none" strike="noStrike" kern="0" cap="none" spc="0" normalizeH="0" baseline="0" noProof="0" dirty="0">
                 <a:ln>
@@ -21333,50 +20778,26 @@
                 <a:uLnTx/>
                 <a:uFillTx/>
               </a:rPr>
-              <a:t>Gouvernance </a:t>
+              <a:t>Gouvernance</a:t>
             </a:r>
           </a:p>
           <a:p>
-            <a:pPr marL="0" marR="0" lvl="0" indent="0" algn="ctr" defTabSz="914400" eaLnBrk="1" fontAlgn="auto" latinLnBrk="0" hangingPunct="1">
-              <a:lnSpc>
-                <a:spcPct val="100000"/>
-              </a:lnSpc>
-              <a:spcBef>
-                <a:spcPts val="0"/>
-              </a:spcBef>
-              <a:spcAft>
-                <a:spcPts val="0"/>
-              </a:spcAft>
-              <a:buClrTx/>
-              <a:buSzTx/>
-              <a:buFontTx/>
-              <a:buNone/>
-              <a:tabLst/>
-              <a:defRPr/>
-            </a:pPr>
             <a:r>
-              <a:rPr lang="en-US" sz="1200" b="1" kern="0" dirty="0">
+              <a:rPr kumimoji="0" lang="en-US" sz="1200" b="1" i="0" u="none" strike="noStrike" kern="0" cap="none" spc="0" normalizeH="0" baseline="0" noProof="0" dirty="0">
+                <a:ln>
+                  <a:noFill/>
+                </a:ln>
                 <a:solidFill>
                   <a:srgbClr val="FFFFFF">
                     <a:lumMod val="95000"/>
                   </a:srgbClr>
                 </a:solidFill>
+                <a:effectLst/>
+                <a:uLnTx/>
+                <a:uFillTx/>
               </a:rPr>
               <a:t>informatique</a:t>
             </a:r>
-            <a:endParaRPr kumimoji="0" lang="en-US" sz="1200" b="0" i="0" u="none" strike="noStrike" kern="0" cap="none" spc="0" normalizeH="0" baseline="0" noProof="0" dirty="0">
-              <a:ln>
-                <a:noFill/>
-              </a:ln>
-              <a:solidFill>
-                <a:srgbClr val="FFFFFF">
-                  <a:lumMod val="95000"/>
-                </a:srgbClr>
-              </a:solidFill>
-              <a:effectLst/>
-              <a:uLnTx/>
-              <a:uFillTx/>
-            </a:endParaRPr>
           </a:p>
         </p:txBody>
       </p:sp>
@@ -21410,23 +20831,6 @@
           </a:bodyPr>
           <a:lstStyle/>
           <a:p>
-            <a:pPr marL="0" marR="0" lvl="0" indent="0" algn="r" defTabSz="914400" eaLnBrk="1" fontAlgn="auto" latinLnBrk="0" hangingPunct="1">
-              <a:lnSpc>
-                <a:spcPct val="100000"/>
-              </a:lnSpc>
-              <a:spcBef>
-                <a:spcPts val="0"/>
-              </a:spcBef>
-              <a:spcAft>
-                <a:spcPts val="0"/>
-              </a:spcAft>
-              <a:buClrTx/>
-              <a:buSzTx/>
-              <a:buFontTx/>
-              <a:buNone/>
-              <a:tabLst/>
-              <a:defRPr/>
-            </a:pPr>
             <a:r>
               <a:rPr kumimoji="0" lang="en-US" sz="1050" b="0" i="0" u="none" strike="noStrike" kern="0" cap="none" spc="0" normalizeH="0" baseline="0" noProof="0" dirty="0">
                 <a:ln>
@@ -21436,28 +20840,7 @@
                 <a:uLnTx/>
                 <a:uFillTx/>
               </a:rPr>
-              <a:t>Les projets informatiques doivent être alignés sur la stratégie de l'entreprise, la performance IT doit être régulièrement surveillée, et une communication efficace doit exister entre l'IT et les</a:t>
-            </a:r>
-            <a:br>
-              <a:rPr kumimoji="0" lang="en-US" sz="1050" b="0" i="0" u="none" strike="noStrike" kern="0" cap="none" spc="0" normalizeH="0" baseline="0" noProof="0" dirty="0">
-                <a:ln>
-                  <a:noFill/>
-                </a:ln>
-                <a:effectLst/>
-                <a:uLnTx/>
-                <a:uFillTx/>
-              </a:rPr>
-            </a:br>
-            <a:r>
-              <a:rPr kumimoji="0" lang="en-US" sz="1050" b="0" i="0" u="none" strike="noStrike" kern="0" cap="none" spc="0" normalizeH="0" baseline="0" noProof="0" dirty="0">
-                <a:ln>
-                  <a:noFill/>
-                </a:ln>
-                <a:effectLst/>
-                <a:uLnTx/>
-                <a:uFillTx/>
-              </a:rPr>
-              <a:t>utilisateurs métier.</a:t>
+              <a:t>Les projets informatiques doivent être alignés sur la stratégie de l'entreprise, la performance informatique doit être suivie régulièrement, et une communication efficace doit exister entre l'informatique et les utilisateurs métier.</a:t>
             </a:r>
           </a:p>
         </p:txBody>
@@ -21492,23 +20875,6 @@
           </a:bodyPr>
           <a:lstStyle/>
           <a:p>
-            <a:pPr marL="0" marR="0" lvl="0" indent="0" algn="r" defTabSz="914400" eaLnBrk="1" fontAlgn="auto" latinLnBrk="0" hangingPunct="1">
-              <a:lnSpc>
-                <a:spcPct val="100000"/>
-              </a:lnSpc>
-              <a:spcBef>
-                <a:spcPts val="0"/>
-              </a:spcBef>
-              <a:spcAft>
-                <a:spcPts val="0"/>
-              </a:spcAft>
-              <a:buClrTx/>
-              <a:buSzTx/>
-              <a:buFontTx/>
-              <a:buNone/>
-              <a:tabLst/>
-              <a:defRPr/>
-            </a:pPr>
             <a:r>
               <a:rPr kumimoji="0" lang="en-US" sz="1050" b="0" i="0" u="none" strike="noStrike" kern="0" cap="none" spc="0" normalizeH="0" baseline="0" noProof="0" dirty="0">
                 <a:ln>
@@ -21518,70 +20884,7 @@
                 <a:uLnTx/>
                 <a:uFillTx/>
               </a:rPr>
-              <a:t>Les effectifs IT et les dispositifs de support informatique doivent être adaptés au niveau de besoin, avec les compétences requises en place</a:t>
-            </a:r>
-            <a:br>
-              <a:rPr kumimoji="0" lang="en-US" sz="1050" b="0" i="0" u="none" strike="noStrike" kern="0" cap="none" spc="0" normalizeH="0" baseline="0" noProof="0" dirty="0">
-                <a:ln>
-                  <a:noFill/>
-                </a:ln>
-                <a:effectLst/>
-                <a:uLnTx/>
-                <a:uFillTx/>
-              </a:rPr>
-            </a:br>
-            <a:r>
-              <a:rPr kumimoji="0" lang="en-US" sz="1050" b="0" i="0" u="none" strike="noStrike" kern="0" cap="none" spc="0" normalizeH="0" baseline="0" noProof="0" dirty="0">
-                <a:ln>
-                  <a:noFill/>
-                </a:ln>
-                <a:effectLst/>
-                <a:uLnTx/>
-                <a:uFillTx/>
-              </a:rPr>
-              <a:t>ainsi que des parcours de carrière</a:t>
-            </a:r>
-            <a:br>
-              <a:rPr kumimoji="0" lang="en-US" sz="1050" b="0" i="0" u="none" strike="noStrike" kern="0" cap="none" spc="0" normalizeH="0" baseline="0" noProof="0" dirty="0">
-                <a:ln>
-                  <a:noFill/>
-                </a:ln>
-                <a:effectLst/>
-                <a:uLnTx/>
-                <a:uFillTx/>
-              </a:rPr>
-            </a:br>
-            <a:r>
-              <a:rPr kumimoji="0" lang="en-US" sz="1050" b="0" i="0" u="none" strike="noStrike" kern="0" cap="none" spc="0" normalizeH="0" baseline="0" noProof="0" dirty="0">
-                <a:ln>
-                  <a:noFill/>
-                </a:ln>
-                <a:effectLst/>
-                <a:uLnTx/>
-                <a:uFillTx/>
-              </a:rPr>
-              <a:t>et des plans de fidélisation</a:t>
-            </a:r>
-            <a:br>
-              <a:rPr kumimoji="0" lang="en-US" sz="1050" b="0" i="0" u="none" strike="noStrike" kern="0" cap="none" spc="0" normalizeH="0" baseline="0" noProof="0" dirty="0">
-                <a:ln>
-                  <a:noFill/>
-                </a:ln>
-                <a:effectLst/>
-                <a:uLnTx/>
-                <a:uFillTx/>
-              </a:rPr>
-            </a:br>
-            <a:r>
-              <a:rPr kumimoji="0" lang="en-US" sz="1050" b="0" i="0" u="none" strike="noStrike" kern="0" cap="none" spc="0" normalizeH="0" baseline="0" noProof="0" dirty="0">
-                <a:ln>
-                  <a:noFill/>
-                </a:ln>
-                <a:effectLst/>
-                <a:uLnTx/>
-                <a:uFillTx/>
-              </a:rPr>
-              <a:t>pour le personnel. </a:t>
+              <a:t>Le personnel et le support informatiques doivent être adaptés au niveau de besoin, avec les compétences requises ainsi que des parcours de carrière et des plans de fidélisation en place pour le personnel.</a:t>
             </a:r>
           </a:p>
         </p:txBody>
@@ -21616,23 +20919,6 @@
           </a:bodyPr>
           <a:lstStyle/>
           <a:p>
-            <a:pPr marL="0" marR="0" lvl="0" indent="0" defTabSz="914400" eaLnBrk="1" fontAlgn="auto" latinLnBrk="0" hangingPunct="1">
-              <a:lnSpc>
-                <a:spcPct val="100000"/>
-              </a:lnSpc>
-              <a:spcBef>
-                <a:spcPts val="0"/>
-              </a:spcBef>
-              <a:spcAft>
-                <a:spcPts val="0"/>
-              </a:spcAft>
-              <a:buClrTx/>
-              <a:buSzTx/>
-              <a:buFontTx/>
-              <a:buNone/>
-              <a:tabLst/>
-              <a:defRPr/>
-            </a:pPr>
             <a:r>
               <a:rPr kumimoji="0" lang="en-US" sz="1050" b="0" i="0" u="none" strike="noStrike" kern="0" cap="none" spc="0" normalizeH="0" baseline="0" noProof="0" dirty="0">
                 <a:ln>
@@ -21642,66 +20928,34 @@
                 <a:uLnTx/>
                 <a:uFillTx/>
               </a:rPr>
-              <a:t>Les systèmes informatiques doivent être adaptés aux besoins métiers, les données doivent être bien gérées et accessibles, et l’infrastructure doit être efficacement surveillée et maintenue.</a:t>
+              <a:t>Les systèmes informatiques doivent être adaptés aux besoins de l'entreprise, les données doivent être bien gérées et accessibles, et l'infrastructure doit être surveillée et maintenue efficacement.</a:t>
             </a:r>
           </a:p>
           <a:p>
-            <a:pPr marL="0" marR="0" lvl="0" indent="0" defTabSz="914400" eaLnBrk="1" fontAlgn="auto" latinLnBrk="0" hangingPunct="1">
-              <a:lnSpc>
-                <a:spcPct val="100000"/>
-              </a:lnSpc>
-              <a:spcBef>
-                <a:spcPts val="0"/>
-              </a:spcBef>
-              <a:spcAft>
-                <a:spcPts val="0"/>
-              </a:spcAft>
-              <a:buClrTx/>
-              <a:buSzTx/>
-              <a:buFontTx/>
-              <a:buNone/>
-              <a:tabLst/>
-              <a:defRPr/>
-            </a:pPr>
-            <a:endParaRPr lang="en-US" sz="1050" kern="0" dirty="0">
-              <a:solidFill>
-                <a:srgbClr val="888B8D">
-                  <a:lumMod val="50000"/>
-                </a:srgbClr>
-              </a:solidFill>
-            </a:endParaRPr>
-          </a:p>
-          <a:p>
-            <a:pPr marL="0" marR="0" lvl="0" indent="0" defTabSz="914400" eaLnBrk="1" fontAlgn="auto" latinLnBrk="0" hangingPunct="1">
-              <a:lnSpc>
-                <a:spcPct val="100000"/>
-              </a:lnSpc>
-              <a:spcBef>
-                <a:spcPts val="0"/>
-              </a:spcBef>
-              <a:spcAft>
-                <a:spcPts val="0"/>
-              </a:spcAft>
-              <a:buClrTx/>
-              <a:buSzTx/>
-              <a:buFontTx/>
-              <a:buNone/>
-              <a:tabLst/>
-              <a:defRPr/>
-            </a:pPr>
-            <a:endParaRPr kumimoji="0" lang="en-US" sz="1050" b="0" i="0" u="none" strike="noStrike" kern="0" cap="none" spc="0" normalizeH="0" baseline="0" noProof="0" dirty="0">
-              <a:ln>
-                <a:noFill/>
-              </a:ln>
-              <a:solidFill>
-                <a:srgbClr val="888B8D">
-                  <a:lumMod val="50000"/>
-                </a:srgbClr>
-              </a:solidFill>
-              <a:effectLst/>
-              <a:uLnTx/>
-              <a:uFillTx/>
-            </a:endParaRPr>
+            <a:r>
+              <a:rPr kumimoji="0" lang="en-US" sz="1050" b="0" i="0" u="none" strike="noStrike" kern="0" cap="none" spc="0" normalizeH="0" baseline="0" noProof="0" dirty="0">
+                <a:ln>
+                  <a:noFill/>
+                </a:ln>
+                <a:effectLst/>
+                <a:uLnTx/>
+                <a:uFillTx/>
+              </a:rPr>
+              <a:t/>
+            </a:r>
+          </a:p>
+          <a:p>
+            <a:r>
+              <a:rPr kumimoji="0" lang="en-US" sz="1050" b="0" i="0" u="none" strike="noStrike" kern="0" cap="none" spc="0" normalizeH="0" baseline="0" noProof="0" dirty="0">
+                <a:ln>
+                  <a:noFill/>
+                </a:ln>
+                <a:effectLst/>
+                <a:uLnTx/>
+                <a:uFillTx/>
+              </a:rPr>
+              <a:t/>
+            </a:r>
           </a:p>
         </p:txBody>
       </p:sp>
@@ -21759,37 +21013,8 @@
           <a:p>
             <a:r>
               <a:rPr lang="en-GB" dirty="0"/>
-              <a:t>Le </a:t>
+              <a:t>Le parcours – élaborer la stratégie numérique</a:t>
             </a:r>
-            <a:r>
-              <a:rPr lang="en-GB" dirty="0" smtClean="0"/>
-              <a:t>parcours </a:t>
-            </a:r>
-            <a:r>
-              <a:rPr lang="en-GB" dirty="0"/>
-              <a:t>– </a:t>
-            </a:r>
-            <a:r>
-              <a:rPr lang="en-GB" dirty="0" smtClean="0"/>
-              <a:t>développer la </a:t>
-            </a:r>
-            <a:r>
-              <a:rPr lang="en-GB" dirty="0"/>
-              <a:t>S</a:t>
-            </a:r>
-            <a:r>
-              <a:rPr lang="en-GB" dirty="0" smtClean="0"/>
-              <a:t>tratégie </a:t>
-            </a:r>
-            <a:r>
-              <a:rPr lang="en-GB" dirty="0"/>
-              <a:t>N</a:t>
-            </a:r>
-            <a:r>
-              <a:rPr lang="en-GB" dirty="0" smtClean="0"/>
-              <a:t>umérique</a:t>
-            </a:r>
-            <a:endParaRPr lang="en-GB" dirty="0"/>
           </a:p>
         </p:txBody>
       </p:sp>

--- a/fixtures/real-world/rsm-technology-strategy-fr.pptx
+++ b/fixtures/real-world/rsm-technology-strategy-fr.pptx
@@ -1752,7 +1752,7 @@
         <a:p>
           <a:r>
             <a:rPr lang="en-GB" sz="1100" b="1" dirty="0" smtClean="0"/>
-            <a:t>Stratégie numérique et informatique</a:t>
+            <a:t>Digital &amp; IT strategy</a:t>
           </a:r>
           <a:endParaRPr lang="en-GB" sz="1100" b="1" dirty="0"/>
         </a:p>
@@ -1789,7 +1789,7 @@
         <a:p>
           <a:r>
             <a:rPr lang="en-GB" sz="1100" b="1" dirty="0" smtClean="0"/>
-            <a:t>ERP et systèmes comptables</a:t>
+            <a:t>ERP &amp; accounting systems</a:t>
           </a:r>
           <a:endParaRPr lang="en-GB" sz="1100" b="1" dirty="0"/>
         </a:p>
@@ -1830,7 +1830,7 @@
               <a:ea typeface="+mn-ea"/>
               <a:cs typeface="+mn-cs"/>
             </a:rPr>
-            <a:t>Risque informatique</a:t>
+            <a:t>IT risk</a:t>
           </a:r>
           <a:br>
             <a:rPr lang="en-GB" sz="1100" b="1" smtClean="0">
@@ -1845,7 +1845,7 @@
               <a:ea typeface="+mn-ea"/>
               <a:cs typeface="+mn-cs"/>
             </a:rPr>
-            <a:t>et</a:t>
+            <a:t>and</a:t>
           </a:r>
           <a:br>
             <a:rPr lang="en-GB" sz="1100" b="1" smtClean="0">
@@ -1860,7 +1860,7 @@
               <a:ea typeface="+mn-ea"/>
               <a:cs typeface="+mn-cs"/>
             </a:rPr>
-            <a:t>sécurité</a:t>
+            <a:t>security</a:t>
           </a:r>
           <a:endParaRPr lang="en-GB" sz="1100" b="1" dirty="0"/>
         </a:p>
@@ -1897,7 +1897,7 @@
         <a:p>
           <a:r>
             <a:rPr lang="en-GB" sz="1100" b="1" dirty="0" smtClean="0"/>
-            <a:t>Résilience informatique</a:t>
+            <a:t>IT resilience</a:t>
           </a:r>
           <a:endParaRPr lang="en-GB" sz="1100" b="1" dirty="0"/>
         </a:p>
@@ -1934,7 +1934,7 @@
         <a:p>
           <a:r>
             <a:rPr lang="en-GB" sz="1100" b="1" dirty="0" smtClean="0"/>
-            <a:t>Sélection de systèmes</a:t>
+            <a:t>System selection</a:t>
           </a:r>
           <a:endParaRPr lang="en-GB" sz="1100" b="1" dirty="0"/>
         </a:p>
@@ -1971,7 +1971,7 @@
         <a:p>
           <a:r>
             <a:rPr lang="en-GB" sz="1100" b="1" dirty="0" smtClean="0"/>
-            <a:t>Conduite de projets informatiques</a:t>
+            <a:t>IT project delivery</a:t>
           </a:r>
           <a:endParaRPr lang="en-GB" sz="1100" b="1" dirty="0"/>
         </a:p>
@@ -2351,7 +2351,7 @@
         <a:p>
           <a:r>
             <a:rPr lang="en-GB" dirty="0" smtClean="0"/>
-            <a:t>Créer une vision numérique</a:t>
+            <a:t>Create a Digital Vision</a:t>
           </a:r>
           <a:endParaRPr lang="en-GB" dirty="0"/>
         </a:p>
@@ -2388,7 +2388,7 @@
         <a:p>
           <a:r>
             <a:rPr lang="en-GB" dirty="0" smtClean="0"/>
-            <a:t>Établir un leadership clair</a:t>
+            <a:t>Establish clear leadership</a:t>
           </a:r>
           <a:endParaRPr lang="en-GB" dirty="0"/>
         </a:p>
@@ -2425,7 +2425,7 @@
         <a:p>
           <a:r>
             <a:rPr lang="en-GB" dirty="0" smtClean="0"/>
-            <a:t>Adopter une culture d'amélioration continue</a:t>
+            <a:t>Adopt a Continuous Improvement culture</a:t>
           </a:r>
           <a:endParaRPr lang="en-GB" dirty="0"/>
         </a:p>
@@ -2462,7 +2462,7 @@
         <a:p>
           <a:r>
             <a:rPr lang="en-GB" sz="1000" dirty="0" smtClean="0"/>
-            <a:t>Le retour d'expérience et l'apprentissage sont essentiels dans la transformation numérique. À mesure que l'organisation se transforme, de nouvelles opportunités se présentent et une culture appropriée d'amélioration continue est nécessaire, le personnel acquérant de nouvelles compétences.</a:t>
+            <a:t>Feedback and learning is key in digital transformation. As the organisation transforms, new opportunities will present themselves and an appropriate culture of continuous improvement is required, with staff acquiring new skills.</a:t>
           </a:r>
           <a:endParaRPr lang="en-GB" sz="1000" dirty="0"/>
         </a:p>
@@ -2499,7 +2499,7 @@
         <a:p>
           <a:r>
             <a:rPr lang="en-GB" dirty="0" smtClean="0"/>
-            <a:t>Sélectionner les technologies numériques appropriées</a:t>
+            <a:t>Select appropriate digital technologies</a:t>
           </a:r>
           <a:endParaRPr lang="en-GB" dirty="0"/>
         </a:p>
@@ -2536,7 +2536,7 @@
         <a:p>
           <a:r>
             <a:rPr lang="en-GB" sz="1000" dirty="0" smtClean="0"/>
-            <a:t>Créer une vision claire de la manière dont la technologie numérique peut soutenir et porter la stratégie d'entreprise de l'organisation. Cela requiert une compréhension du potentiel des nouvelles technologies, associée à une stratégie commerciale clairement définie.</a:t>
+            <a:t> Create a clear vision for how digital technology can support and drive the organisation’s corporate strategy.  This requires an understanding of the potential of new technology combined with a clearly defined commercial strategy</a:t>
           </a:r>
           <a:endParaRPr lang="en-GB" sz="1000" dirty="0"/>
         </a:p>
@@ -2573,7 +2573,7 @@
         <a:p>
           <a:r>
             <a:rPr lang="en-GB" sz="1000" dirty="0" smtClean="0"/>
-            <a:t>Pour que la transformation numérique réussisse, elle exige un engagement total de la direction générale dans toutes les fonctions. Il doit donc exister une vision claire et partagée qui dépasse les frontières des départements, avec une structure de parrainage clairement établie pour les initiatives numériques.</a:t>
+            <a:t>For digital transformation to succeed it requires full commitment from senior management across all functions.  Therefore there has to be a clear and agreed vision that transcends departmental boundaries, with a clear sponsorship structure for digital initiatives</a:t>
           </a:r>
           <a:endParaRPr lang="en-GB" sz="1000" dirty="0"/>
         </a:p>
@@ -2610,7 +2610,7 @@
         <a:p>
           <a:r>
             <a:rPr lang="en-GB" sz="1000" dirty="0" smtClean="0"/>
-            <a:t>Notre expérience nous enseigne que la meilleure approche du changement numérique consiste à éviter d'écarter les idées initiales afin de constituer une longue liste d'initiatives numériques, qui peuvent ensuite être évaluées au regard de la vision numérique.</a:t>
+            <a:t>Our experience tells us that the best approach to digital change is to avoid dismissing early ideas in order to generate a long-list of digital initiatives, which can then be evaluated against the Digital Vision</a:t>
           </a:r>
           <a:endParaRPr lang="en-GB" sz="1000" dirty="0"/>
         </a:p>
@@ -2647,7 +2647,7 @@
         <a:p>
           <a:r>
             <a:rPr lang="en-GB" dirty="0" smtClean="0"/>
-            <a:t>Créer une dynamique</a:t>
+            <a:t>Build momentum</a:t>
           </a:r>
           <a:endParaRPr lang="en-GB" dirty="0"/>
         </a:p>
@@ -2684,7 +2684,7 @@
         <a:p>
           <a:r>
             <a:rPr lang="en-GB" sz="1000" dirty="0" smtClean="0"/>
-            <a:t>Aucune organisation ne peut tout faire à la fois. Il est essentiel de rester réaliste dans la transformation numérique, en commençant par des succès rapides et en bâtissant une dynamique pour faire avancer la transformation.</a:t>
+            <a:t>No organisation can do everything at once.  It is vital to be realistic with digital transformation, starting with quick wins and building momentum to drive the transformation forward. </a:t>
           </a:r>
           <a:endParaRPr lang="en-GB" sz="1000" dirty="0"/>
         </a:p>
@@ -3225,7 +3225,7 @@
           </a:pPr>
           <a:r>
             <a:rPr lang="en-GB" sz="1100" b="1" kern="1200" dirty="0" smtClean="0"/>
-            <a:t>Stratégie numérique et informatique</a:t>
+            <a:t>Digital &amp; IT strategy</a:t>
           </a:r>
           <a:endParaRPr lang="en-GB" sz="1100" b="1" kern="1200" dirty="0"/>
         </a:p>
@@ -3355,7 +3355,7 @@
           </a:pPr>
           <a:r>
             <a:rPr lang="en-GB" sz="1100" b="1" kern="1200" dirty="0" smtClean="0"/>
-            <a:t>ERP et systèmes comptables</a:t>
+            <a:t>System selection</a:t>
           </a:r>
           <a:endParaRPr lang="en-GB" sz="1100" b="1" kern="1200" dirty="0"/>
         </a:p>
@@ -3485,7 +3485,7 @@
           </a:pPr>
           <a:r>
             <a:rPr lang="en-GB" sz="1100" b="1" kern="1200" dirty="0" smtClean="0"/>
-            <a:t>Risque informatique</a:t>
+            <a:t>ERP &amp; accounting systems</a:t>
           </a:r>
           <a:endParaRPr lang="en-GB" sz="1100" b="1" kern="1200" dirty="0"/>
         </a:p>
@@ -3615,7 +3615,7 @@
           </a:pPr>
           <a:r>
             <a:rPr lang="en-GB" sz="1100" b="1" kern="1200" dirty="0" smtClean="0"/>
-            <a:t>Résilience informatique</a:t>
+            <a:t>IT project delivery</a:t>
           </a:r>
           <a:endParaRPr lang="en-GB" sz="1100" b="1" kern="1200" dirty="0"/>
         </a:p>
@@ -3752,7 +3752,7 @@
               <a:ea typeface="+mn-ea"/>
               <a:cs typeface="+mn-cs"/>
             </a:rPr>
-            <a:t>Sélection de systèmes</a:t>
+            <a:t>IT risk</a:t>
           </a:r>
           <a:br>
             <a:rPr lang="en-GB" sz="1100" b="1" kern="1200" smtClean="0">
@@ -3862,7 +3862,7 @@
           </a:pPr>
           <a:r>
             <a:rPr lang="en-GB" sz="1100" b="1" kern="1200" dirty="0" smtClean="0"/>
-            <a:t>Conduite de projets informatiques</a:t>
+            <a:t>IT resilience</a:t>
           </a:r>
           <a:endParaRPr lang="en-GB" sz="1100" b="1" kern="1200" dirty="0"/>
         </a:p>
@@ -3961,7 +3961,7 @@
           </a:pPr>
           <a:r>
             <a:rPr lang="en-GB" sz="1000" kern="1200" dirty="0" smtClean="0"/>
-            <a:t>Créer une vision numérique</a:t>
+            <a:t> Create a clear vision for how digital technology can support and drive the organisation’s corporate strategy.  This requires an understanding of the potential of new technology combined with a clearly defined commercial strategy</a:t>
           </a:r>
           <a:endParaRPr lang="en-GB" sz="1000" kern="1200" dirty="0"/>
         </a:p>
@@ -4038,7 +4038,7 @@
           </a:pPr>
           <a:r>
             <a:rPr lang="en-GB" sz="1100" kern="1200" dirty="0" smtClean="0"/>
-            <a:t>Établir un leadership clair</a:t>
+            <a:t>Create a Digital Vision</a:t>
           </a:r>
           <a:endParaRPr lang="en-GB" sz="1100" kern="1200" dirty="0"/>
         </a:p>
@@ -4125,7 +4125,7 @@
           </a:pPr>
           <a:r>
             <a:rPr lang="en-GB" sz="1000" kern="1200" dirty="0" smtClean="0"/>
-            <a:t>Adopter une culture d'amélioration continue</a:t>
+            <a:t>For digital transformation to succeed it requires full commitment from senior management across all functions.  Therefore there has to be a clear and agreed vision that transcends departmental boundaries, with a clear sponsorship structure for digital initiatives</a:t>
           </a:r>
           <a:endParaRPr lang="en-GB" sz="1000" kern="1200" dirty="0"/>
         </a:p>
@@ -4202,7 +4202,7 @@
           </a:pPr>
           <a:r>
             <a:rPr lang="en-GB" sz="1100" kern="1200" dirty="0" smtClean="0"/>
-            <a:t>Le retour d'expérience et l'apprentissage sont essentiels dans la transformation numérique. À mesure que l'organisation se transforme, de nouvelles opportunités se présentent et une culture appropriée d'amélioration continue est nécessaire, le personnel acquérant de nouvelles compétences.</a:t>
+            <a:t>Establish clear leadership</a:t>
           </a:r>
           <a:endParaRPr lang="en-GB" sz="1100" kern="1200" dirty="0"/>
         </a:p>
@@ -4289,7 +4289,7 @@
           </a:pPr>
           <a:r>
             <a:rPr lang="en-GB" sz="1000" kern="1200" dirty="0" smtClean="0"/>
-            <a:t>Sélectionner les technologies numériques appropriées</a:t>
+            <a:t>Our experience tells us that the best approach to digital change is to avoid dismissing early ideas in order to generate a long-list of digital initiatives, which can then be evaluated against the Digital Vision</a:t>
           </a:r>
           <a:endParaRPr lang="en-GB" sz="1000" kern="1200" dirty="0"/>
         </a:p>
@@ -4366,7 +4366,7 @@
           </a:pPr>
           <a:r>
             <a:rPr lang="en-GB" sz="1100" kern="1200" dirty="0" smtClean="0"/>
-            <a:t>Créer une vision claire de la manière dont la technologie numérique peut soutenir et porter la stratégie d'entreprise de l'organisation. Cela requiert une compréhension du potentiel des nouvelles technologies, associée à une stratégie commerciale clairement définie.</a:t>
+            <a:t>Select appropriate digital technologies</a:t>
           </a:r>
           <a:endParaRPr lang="en-GB" sz="1100" kern="1200" dirty="0"/>
         </a:p>
@@ -4453,7 +4453,7 @@
           </a:pPr>
           <a:r>
             <a:rPr lang="en-GB" sz="1000" kern="1200" dirty="0" smtClean="0"/>
-            <a:t>Pour que la transformation numérique réussisse, elle exige un engagement total de la direction générale dans toutes les fonctions. Il doit donc exister une vision claire et partagée qui dépasse les frontières des départements, avec une structure de parrainage clairement établie pour les initiatives numériques.</a:t>
+            <a:t>No organisation can do everything at once.  It is vital to be realistic with digital transformation, starting with quick wins and building momentum to drive the transformation forward. </a:t>
           </a:r>
           <a:endParaRPr lang="en-GB" sz="1000" kern="1200" dirty="0"/>
         </a:p>
@@ -4530,7 +4530,7 @@
           </a:pPr>
           <a:r>
             <a:rPr lang="en-GB" sz="1100" kern="1200" dirty="0" smtClean="0"/>
-            <a:t>Notre expérience nous enseigne que la meilleure approche du changement numérique consiste à éviter d'écarter les idées initiales afin de constituer une longue liste d'initiatives numériques, qui peuvent ensuite être évaluées au regard de la vision numérique.</a:t>
+            <a:t>Build momentum</a:t>
           </a:r>
           <a:endParaRPr lang="en-GB" sz="1100" kern="1200" dirty="0"/>
         </a:p>
@@ -4617,7 +4617,7 @@
           </a:pPr>
           <a:r>
             <a:rPr lang="en-GB" sz="1000" kern="1200" dirty="0" smtClean="0"/>
-            <a:t>Créer une dynamique</a:t>
+            <a:t>Feedback and learning is key in digital transformation. As the organisation transforms, new opportunities will present themselves and an appropriate culture of continuous improvement is required, with staff acquiring new skills.</a:t>
           </a:r>
           <a:endParaRPr lang="en-GB" sz="1000" kern="1200" dirty="0"/>
         </a:p>
@@ -4694,7 +4694,7 @@
           </a:pPr>
           <a:r>
             <a:rPr lang="en-GB" sz="1100" kern="1200" dirty="0" smtClean="0"/>
-            <a:t>Aucune organisation ne peut tout faire à la fois. Il est essentiel de rester réaliste dans la transformation numérique, en commençant par des succès rapides et en bâtissant une dynamique pour faire avancer la transformation.</a:t>
+            <a:t>Adopt a Continuous Improvement culture</a:t>
           </a:r>
           <a:endParaRPr lang="en-GB" sz="1100" kern="1200" dirty="0"/>
         </a:p>
